--- a/docs/entreprise/deck/Quantinvo-essentiel-marque.pptx
+++ b/docs/entreprise/deck/Quantinvo-essentiel-marque.pptx
@@ -5739,7 +5739,7 @@
                 <a:ea typeface="Sora" pitchFamily="34" charset="-122"/>
                 <a:cs typeface="Sora" pitchFamily="34" charset="-120"/>
               </a:rPr>
-              <a:t>65 €</a:t>
+              <a:t>89 €</a:t>
             </a:r>
             <a:pPr indent="0" marL="0">
               <a:buNone/>
@@ -5792,7 +5792,7 @@
                 <a:ea typeface="Inter" pitchFamily="34" charset="-122"/>
                 <a:cs typeface="Inter" pitchFamily="34" charset="-120"/>
               </a:rPr>
-              <a:t>ou 690 € à l’année — 90 € de moins</a:t>
+              <a:t>ou 950 € à l’année — 118 € de moins</a:t>
             </a:r>
             <a:endParaRPr lang="en-US" sz="950" dirty="0"/>
           </a:p>
@@ -6017,7 +6017,7 @@
                 <a:ea typeface="Sora" pitchFamily="34" charset="-122"/>
                 <a:cs typeface="Sora" pitchFamily="34" charset="-120"/>
               </a:rPr>
-              <a:t>225 €</a:t>
+              <a:t>310 €</a:t>
             </a:r>
             <a:pPr indent="0" marL="0">
               <a:buNone/>
@@ -6070,7 +6070,7 @@
                 <a:ea typeface="Inter" pitchFamily="34" charset="-122"/>
                 <a:cs typeface="Inter" pitchFamily="34" charset="-120"/>
               </a:rPr>
-              <a:t>ou 2 400 € à l’année — 300 € de moins</a:t>
+              <a:t>ou 3 300 € à l’année — 420 € de moins</a:t>
             </a:r>
             <a:endParaRPr lang="en-US" sz="950" dirty="0"/>
           </a:p>
@@ -6256,7 +6256,7 @@
                 <a:ea typeface="Sora" pitchFamily="34" charset="-122"/>
                 <a:cs typeface="Sora" pitchFamily="34" charset="-120"/>
               </a:rPr>
-              <a:t>650 €</a:t>
+              <a:t>890 €</a:t>
             </a:r>
             <a:pPr indent="0" marL="0">
               <a:buNone/>
@@ -6309,7 +6309,7 @@
                 <a:ea typeface="Inter" pitchFamily="34" charset="-122"/>
                 <a:cs typeface="Inter" pitchFamily="34" charset="-120"/>
               </a:rPr>
-              <a:t>ou 6 900 € à l’année — 900 € de moins</a:t>
+              <a:t>ou 9 450 € à l’année — 1 230 € de moins</a:t>
             </a:r>
             <a:endParaRPr lang="en-US" sz="950" dirty="0"/>
           </a:p>

--- a/docs/entreprise/deck/Quantinvo-essentiel-marque.pptx
+++ b/docs/entreprise/deck/Quantinvo-essentiel-marque.pptx
@@ -1727,11 +1727,11 @@
             <a:r>
               <a:rPr lang="en-US" sz="2400" b="1" dirty="0">
                 <a:solidFill>
-                  <a:srgbClr val="0B0F19"/>
-                </a:solidFill>
-                <a:latin typeface="Sora" pitchFamily="34" charset="0"/>
-                <a:ea typeface="Sora" pitchFamily="34" charset="-122"/>
-                <a:cs typeface="Sora" pitchFamily="34" charset="-120"/>
+                  <a:srgbClr val="14181A"/>
+                </a:solidFill>
+                <a:latin typeface="Archivo" pitchFamily="34" charset="0"/>
+                <a:ea typeface="Archivo" pitchFamily="34" charset="-122"/>
+                <a:cs typeface="Archivo" pitchFamily="34" charset="-120"/>
               </a:rPr>
               <a:t>Quantinvo</a:t>
             </a:r>
@@ -1748,17 +1748,17 @@
         <p:spPr>
           <a:xfrm>
             <a:off x="731520" y="1481328"/>
-            <a:ext cx="2377440" cy="25603"/>
+            <a:ext cx="2011680" cy="20117"/>
           </a:xfrm>
           <a:prstGeom prst="rect">
             <a:avLst/>
           </a:prstGeom>
           <a:solidFill>
-            <a:srgbClr val="38C9FF"/>
+            <a:srgbClr val="14181A"/>
           </a:solidFill>
           <a:ln w="12700">
             <a:solidFill>
-              <a:srgbClr val="38C9FF"/>
+              <a:srgbClr val="14181A"/>
             </a:solidFill>
             <a:prstDash val="solid"/>
           </a:ln>
@@ -1791,11 +1791,11 @@
             <a:r>
               <a:rPr lang="en-US" sz="1300" dirty="0">
                 <a:solidFill>
-                  <a:srgbClr val="5B6475"/>
-                </a:solidFill>
-                <a:latin typeface="Inter" pitchFamily="34" charset="0"/>
-                <a:ea typeface="Inter" pitchFamily="34" charset="-122"/>
-                <a:cs typeface="Inter" pitchFamily="34" charset="-120"/>
+                  <a:srgbClr val="575F5C"/>
+                </a:solidFill>
+                <a:latin typeface="Public Sans" pitchFamily="34" charset="0"/>
+                <a:ea typeface="Public Sans" pitchFamily="34" charset="-122"/>
+                <a:cs typeface="Public Sans" pitchFamily="34" charset="-120"/>
               </a:rPr>
               <a:t>L'essentiel en dix pages</a:t>
             </a:r>
@@ -1833,11 +1833,11 @@
             <a:r>
               <a:rPr lang="en-US" sz="4000" b="1" dirty="0">
                 <a:solidFill>
-                  <a:srgbClr val="4636B0"/>
-                </a:solidFill>
-                <a:latin typeface="Sora" pitchFamily="34" charset="0"/>
-                <a:ea typeface="Sora" pitchFamily="34" charset="-122"/>
-                <a:cs typeface="Sora" pitchFamily="34" charset="-120"/>
+                  <a:srgbClr val="14181A"/>
+                </a:solidFill>
+                <a:latin typeface="Archivo" pitchFamily="34" charset="0"/>
+                <a:ea typeface="Archivo" pitchFamily="34" charset="-122"/>
+                <a:cs typeface="Archivo" pitchFamily="34" charset="-120"/>
               </a:rPr>
               <a:t>Le même inventaire, sans la flotte de terminaux.</a:t>
             </a:r>
@@ -1875,11 +1875,11 @@
             <a:r>
               <a:rPr lang="en-US" sz="1500" dirty="0">
                 <a:solidFill>
-                  <a:srgbClr val="3D4556"/>
-                </a:solidFill>
-                <a:latin typeface="Inter" pitchFamily="34" charset="0"/>
-                <a:ea typeface="Inter" pitchFamily="34" charset="-122"/>
-                <a:cs typeface="Inter" pitchFamily="34" charset="-120"/>
+                  <a:srgbClr val="3A423F"/>
+                </a:solidFill>
+                <a:latin typeface="Public Sans" pitchFamily="34" charset="0"/>
+                <a:ea typeface="Public Sans" pitchFamily="34" charset="-122"/>
+                <a:cs typeface="Public Sans" pitchFamily="34" charset="-120"/>
               </a:rPr>
               <a:t>Vos équipes comptent avec le téléphone qu'elles ont déjà. Vous suivez depuis le bureau. Le rapport sort croisé avec votre stock théorique. Rien d'autre à acheter.</a:t>
             </a:r>
@@ -1914,11 +1914,11 @@
             <a:r>
               <a:rPr lang="en-US" sz="1050" dirty="0">
                 <a:solidFill>
-                  <a:srgbClr val="5B6475"/>
-                </a:solidFill>
-                <a:latin typeface="Inter" pitchFamily="34" charset="0"/>
-                <a:ea typeface="Inter" pitchFamily="34" charset="-122"/>
-                <a:cs typeface="Inter" pitchFamily="34" charset="-120"/>
+                  <a:srgbClr val="575F5C"/>
+                </a:solidFill>
+                <a:latin typeface="Public Sans" pitchFamily="34" charset="0"/>
+                <a:ea typeface="Public Sans" pitchFamily="34" charset="-122"/>
+                <a:cs typeface="Public Sans" pitchFamily="34" charset="-120"/>
               </a:rPr>
               <a:t>Devkaylab  ·  août 2026  ·  www.quantinvo.com</a:t>
             </a:r>
@@ -2009,11 +2009,11 @@
             <a:r>
               <a:rPr lang="en-US" sz="2400" b="1" dirty="0">
                 <a:solidFill>
-                  <a:srgbClr val="0B0F19"/>
-                </a:solidFill>
-                <a:latin typeface="Sora" pitchFamily="34" charset="0"/>
-                <a:ea typeface="Sora" pitchFamily="34" charset="-122"/>
-                <a:cs typeface="Sora" pitchFamily="34" charset="-120"/>
+                  <a:srgbClr val="14181A"/>
+                </a:solidFill>
+                <a:latin typeface="Archivo" pitchFamily="34" charset="0"/>
+                <a:ea typeface="Archivo" pitchFamily="34" charset="-122"/>
+                <a:cs typeface="Archivo" pitchFamily="34" charset="-120"/>
               </a:rPr>
               <a:t>Quantinvo</a:t>
             </a:r>
@@ -2030,17 +2030,17 @@
         <p:spPr>
           <a:xfrm>
             <a:off x="731520" y="1481328"/>
-            <a:ext cx="2377440" cy="25603"/>
+            <a:ext cx="2011680" cy="20117"/>
           </a:xfrm>
           <a:prstGeom prst="rect">
             <a:avLst/>
           </a:prstGeom>
           <a:solidFill>
-            <a:srgbClr val="38C9FF"/>
+            <a:srgbClr val="14181A"/>
           </a:solidFill>
           <a:ln w="12700">
             <a:solidFill>
-              <a:srgbClr val="38C9FF"/>
+              <a:srgbClr val="14181A"/>
             </a:solidFill>
             <a:prstDash val="solid"/>
           </a:ln>
@@ -2076,11 +2076,11 @@
             <a:r>
               <a:rPr lang="en-US" sz="3600" b="1" dirty="0">
                 <a:solidFill>
-                  <a:srgbClr val="4636B0"/>
-                </a:solidFill>
-                <a:latin typeface="Sora" pitchFamily="34" charset="0"/>
-                <a:ea typeface="Sora" pitchFamily="34" charset="-122"/>
-                <a:cs typeface="Sora" pitchFamily="34" charset="-120"/>
+                  <a:srgbClr val="14181A"/>
+                </a:solidFill>
+                <a:latin typeface="Archivo" pitchFamily="34" charset="0"/>
+                <a:ea typeface="Archivo" pitchFamily="34" charset="-122"/>
+                <a:cs typeface="Archivo" pitchFamily="34" charset="-120"/>
               </a:rPr>
               <a:t>Un rayon, un mardi matin.</a:t>
             </a:r>
@@ -2118,11 +2118,11 @@
             <a:r>
               <a:rPr lang="en-US" sz="1450" dirty="0">
                 <a:solidFill>
-                  <a:srgbClr val="3D4556"/>
-                </a:solidFill>
-                <a:latin typeface="Inter" pitchFamily="34" charset="0"/>
-                <a:ea typeface="Inter" pitchFamily="34" charset="-122"/>
-                <a:cs typeface="Inter" pitchFamily="34" charset="-120"/>
+                  <a:srgbClr val="3A423F"/>
+                </a:solidFill>
+                <a:latin typeface="Public Sans" pitchFamily="34" charset="0"/>
+                <a:ea typeface="Public Sans" pitchFamily="34" charset="-122"/>
+                <a:cs typeface="Public Sans" pitchFamily="34" charset="-120"/>
               </a:rPr>
               <a:t>Venez avec votre stock théorique : vous l'importez, deux personnes de votre équipe balisent un rayon et le comptent, et vous repartez avec le rapport. Trente minutes, sur vos données, sans rien installer.</a:t>
             </a:r>
@@ -2157,11 +2157,11 @@
             <a:r>
               <a:rPr lang="en-US" sz="1500" b="1" dirty="0">
                 <a:solidFill>
-                  <a:srgbClr val="4636B0"/>
-                </a:solidFill>
-                <a:latin typeface="Sora" pitchFamily="34" charset="0"/>
-                <a:ea typeface="Sora" pitchFamily="34" charset="-122"/>
-                <a:cs typeface="Sora" pitchFamily="34" charset="-120"/>
+                  <a:srgbClr val="14181A"/>
+                </a:solidFill>
+                <a:latin typeface="Archivo" pitchFamily="34" charset="0"/>
+                <a:ea typeface="Archivo" pitchFamily="34" charset="-122"/>
+                <a:cs typeface="Archivo" pitchFamily="34" charset="-120"/>
               </a:rPr>
               <a:t>contact@quantinvo.com   ·   www.quantinvo.com</a:t>
             </a:r>
@@ -2196,11 +2196,11 @@
             <a:r>
               <a:rPr lang="en-US" sz="1050" dirty="0">
                 <a:solidFill>
-                  <a:srgbClr val="5B6475"/>
-                </a:solidFill>
-                <a:latin typeface="Inter" pitchFamily="34" charset="0"/>
-                <a:ea typeface="Inter" pitchFamily="34" charset="-122"/>
-                <a:cs typeface="Inter" pitchFamily="34" charset="-120"/>
+                  <a:srgbClr val="575F5C"/>
+                </a:solidFill>
+                <a:latin typeface="Public Sans" pitchFamily="34" charset="0"/>
+                <a:ea typeface="Public Sans" pitchFamily="34" charset="-122"/>
+                <a:cs typeface="Public Sans" pitchFamily="34" charset="-120"/>
               </a:rPr>
               <a:t>Quantinvo, par Devkaylab. L’outil d’inventaire pour le commerce.</a:t>
             </a:r>
@@ -2291,11 +2291,11 @@
             <a:r>
               <a:rPr lang="en-US" sz="1600" b="1" dirty="0">
                 <a:solidFill>
-                  <a:srgbClr val="0B0F19"/>
-                </a:solidFill>
-                <a:latin typeface="Sora" pitchFamily="34" charset="0"/>
-                <a:ea typeface="Sora" pitchFamily="34" charset="-122"/>
-                <a:cs typeface="Sora" pitchFamily="34" charset="-120"/>
+                  <a:srgbClr val="14181A"/>
+                </a:solidFill>
+                <a:latin typeface="Archivo" pitchFamily="34" charset="0"/>
+                <a:ea typeface="Archivo" pitchFamily="34" charset="-122"/>
+                <a:cs typeface="Archivo" pitchFamily="34" charset="-120"/>
               </a:rPr>
               <a:t>Quantinvo</a:t>
             </a:r>
@@ -2330,11 +2330,11 @@
             <a:r>
               <a:rPr lang="en-US" sz="1000" dirty="0">
                 <a:solidFill>
-                  <a:srgbClr val="5B6475"/>
-                </a:solidFill>
-                <a:latin typeface="Inter" pitchFamily="34" charset="0"/>
-                <a:ea typeface="Inter" pitchFamily="34" charset="-122"/>
-                <a:cs typeface="Inter" pitchFamily="34" charset="-120"/>
+                  <a:srgbClr val="575F5C"/>
+                </a:solidFill>
+                <a:latin typeface="Public Sans" pitchFamily="34" charset="0"/>
+                <a:ea typeface="Public Sans" pitchFamily="34" charset="-122"/>
+                <a:cs typeface="Public Sans" pitchFamily="34" charset="-120"/>
               </a:rPr>
               <a:t>La vraie question</a:t>
             </a:r>
@@ -2351,17 +2351,17 @@
         <p:spPr>
           <a:xfrm>
             <a:off x="731520" y="877824"/>
-            <a:ext cx="10725912" cy="25603"/>
+            <a:ext cx="10725912" cy="10973"/>
           </a:xfrm>
           <a:prstGeom prst="rect">
             <a:avLst/>
           </a:prstGeom>
           <a:solidFill>
-            <a:srgbClr val="38C9FF"/>
+            <a:srgbClr val="E2E5E1"/>
           </a:solidFill>
           <a:ln w="12700">
             <a:solidFill>
-              <a:srgbClr val="38C9FF"/>
+              <a:srgbClr val="E2E5E1"/>
             </a:solidFill>
             <a:prstDash val="solid"/>
           </a:ln>
@@ -2397,11 +2397,11 @@
             <a:r>
               <a:rPr lang="en-US" sz="2600" b="1" dirty="0">
                 <a:solidFill>
-                  <a:srgbClr val="4636B0"/>
-                </a:solidFill>
-                <a:latin typeface="Sora" pitchFamily="34" charset="0"/>
-                <a:ea typeface="Sora" pitchFamily="34" charset="-122"/>
-                <a:cs typeface="Sora" pitchFamily="34" charset="-120"/>
+                  <a:srgbClr val="14181A"/>
+                </a:solidFill>
+                <a:latin typeface="Archivo" pitchFamily="34" charset="0"/>
+                <a:ea typeface="Archivo" pitchFamily="34" charset="-122"/>
+                <a:cs typeface="Archivo" pitchFamily="34" charset="-120"/>
               </a:rPr>
               <a:t>La licence n’est pas ce que vous payez.</a:t>
             </a:r>
@@ -2436,11 +2436,11 @@
             <a:r>
               <a:rPr lang="en-US" sz="5400" b="1" dirty="0">
                 <a:solidFill>
-                  <a:srgbClr val="4636B0"/>
-                </a:solidFill>
-                <a:latin typeface="Sora" pitchFamily="34" charset="0"/>
-                <a:ea typeface="Sora" pitchFamily="34" charset="-122"/>
-                <a:cs typeface="Sora" pitchFamily="34" charset="-120"/>
+                  <a:srgbClr val="1E4D3B"/>
+                </a:solidFill>
+                <a:latin typeface="Archivo" pitchFamily="34" charset="0"/>
+                <a:ea typeface="Archivo" pitchFamily="34" charset="-122"/>
+                <a:cs typeface="Archivo" pitchFamily="34" charset="-120"/>
               </a:rPr>
               <a:t>0</a:t>
             </a:r>
@@ -2478,11 +2478,11 @@
             <a:r>
               <a:rPr lang="en-US" sz="1200" dirty="0">
                 <a:solidFill>
-                  <a:srgbClr val="5B6475"/>
-                </a:solidFill>
-                <a:latin typeface="Inter" pitchFamily="34" charset="0"/>
-                <a:ea typeface="Inter" pitchFamily="34" charset="-122"/>
-                <a:cs typeface="Inter" pitchFamily="34" charset="-120"/>
+                  <a:srgbClr val="575F5C"/>
+                </a:solidFill>
+                <a:latin typeface="Public Sans" pitchFamily="34" charset="0"/>
+                <a:ea typeface="Public Sans" pitchFamily="34" charset="-122"/>
+                <a:cs typeface="Public Sans" pitchFamily="34" charset="-120"/>
               </a:rPr>
               <a:t>terminal à acheter, à louer, à charger, à configurer ou à remplacer.</a:t>
             </a:r>
@@ -2523,11 +2523,11 @@
             <a:r>
               <a:rPr lang="en-US" sz="1300" b="1" dirty="0">
                 <a:solidFill>
-                  <a:srgbClr val="0B0F19"/>
-                </a:solidFill>
-                <a:latin typeface="Inter" pitchFamily="34" charset="0"/>
-                <a:ea typeface="Inter" pitchFamily="34" charset="-122"/>
-                <a:cs typeface="Inter" pitchFamily="34" charset="-120"/>
+                  <a:srgbClr val="14181A"/>
+                </a:solidFill>
+                <a:latin typeface="Public Sans" pitchFamily="34" charset="0"/>
+                <a:ea typeface="Public Sans" pitchFamily="34" charset="-122"/>
+                <a:cs typeface="Public Sans" pitchFamily="34" charset="-120"/>
               </a:rPr>
               <a:t>Le matériel. </a:t>
             </a:r>
@@ -2543,11 +2543,11 @@
             <a:r>
               <a:rPr lang="en-US" sz="1300" dirty="0">
                 <a:solidFill>
-                  <a:srgbClr val="3D4556"/>
-                </a:solidFill>
-                <a:latin typeface="Inter" pitchFamily="34" charset="0"/>
-                <a:ea typeface="Inter" pitchFamily="34" charset="-122"/>
-                <a:cs typeface="Inter" pitchFamily="34" charset="-120"/>
+                  <a:srgbClr val="3A423F"/>
+                </a:solidFill>
+                <a:latin typeface="Public Sans" pitchFamily="34" charset="0"/>
+                <a:ea typeface="Public Sans" pitchFamily="34" charset="-122"/>
+                <a:cs typeface="Public Sans" pitchFamily="34" charset="-120"/>
               </a:rPr>
               <a:t>Une flotte de terminaux durcis s'achète ou se loue, se recharge, se configure, se répare et se remplace. Sur trois ans, elle pèse souvent plus lourd que la licence qu'elle sert.</a:t>
             </a:r>
@@ -2566,11 +2566,11 @@
             <a:r>
               <a:rPr lang="en-US" sz="1300" b="1" dirty="0">
                 <a:solidFill>
-                  <a:srgbClr val="0B0F19"/>
-                </a:solidFill>
-                <a:latin typeface="Inter" pitchFamily="34" charset="0"/>
-                <a:ea typeface="Inter" pitchFamily="34" charset="-122"/>
-                <a:cs typeface="Inter" pitchFamily="34" charset="-120"/>
+                  <a:srgbClr val="14181A"/>
+                </a:solidFill>
+                <a:latin typeface="Public Sans" pitchFamily="34" charset="0"/>
+                <a:ea typeface="Public Sans" pitchFamily="34" charset="-122"/>
+                <a:cs typeface="Public Sans" pitchFamily="34" charset="-120"/>
               </a:rPr>
               <a:t>Les heures. </a:t>
             </a:r>
@@ -2586,11 +2586,11 @@
             <a:r>
               <a:rPr lang="en-US" sz="1300" dirty="0">
                 <a:solidFill>
-                  <a:srgbClr val="3D4556"/>
-                </a:solidFill>
-                <a:latin typeface="Inter" pitchFamily="34" charset="0"/>
-                <a:ea typeface="Inter" pitchFamily="34" charset="-122"/>
-                <a:cs typeface="Inter" pitchFamily="34" charset="-120"/>
+                  <a:srgbClr val="3A423F"/>
+                </a:solidFill>
+                <a:latin typeface="Public Sans" pitchFamily="34" charset="0"/>
+                <a:ea typeface="Public Sans" pitchFamily="34" charset="-122"/>
+                <a:cs typeface="Public Sans" pitchFamily="34" charset="-120"/>
               </a:rPr>
               <a:t>Connecter et vérifier les terminaux un par un avant chaque session, briefer les compteurs sur leur maniement, rester posté sur la plateforme pendant le comptage : c'est un poste à temps partiel que personne ne budgète.</a:t>
             </a:r>
@@ -2609,11 +2609,11 @@
             <a:r>
               <a:rPr lang="en-US" sz="1300" b="1" dirty="0">
                 <a:solidFill>
-                  <a:srgbClr val="0B0F19"/>
-                </a:solidFill>
-                <a:latin typeface="Inter" pitchFamily="34" charset="0"/>
-                <a:ea typeface="Inter" pitchFamily="34" charset="-122"/>
-                <a:cs typeface="Inter" pitchFamily="34" charset="-120"/>
+                  <a:srgbClr val="14181A"/>
+                </a:solidFill>
+                <a:latin typeface="Public Sans" pitchFamily="34" charset="0"/>
+                <a:ea typeface="Public Sans" pitchFamily="34" charset="-122"/>
+                <a:cs typeface="Public Sans" pitchFamily="34" charset="-120"/>
               </a:rPr>
               <a:t>La réconciliation. </a:t>
             </a:r>
@@ -2629,11 +2629,11 @@
             <a:r>
               <a:rPr lang="en-US" sz="1300" dirty="0">
                 <a:solidFill>
-                  <a:srgbClr val="3D4556"/>
-                </a:solidFill>
-                <a:latin typeface="Inter" pitchFamily="34" charset="0"/>
-                <a:ea typeface="Inter" pitchFamily="34" charset="-122"/>
-                <a:cs typeface="Inter" pitchFamily="34" charset="-120"/>
+                  <a:srgbClr val="3A423F"/>
+                </a:solidFill>
+                <a:latin typeface="Public Sans" pitchFamily="34" charset="0"/>
+                <a:ea typeface="Public Sans" pitchFamily="34" charset="-122"/>
+                <a:cs typeface="Public Sans" pitchFamily="34" charset="-120"/>
               </a:rPr>
               <a:t>Un rapport de variance à rapprocher à la main du stock théorique, après chaque inventaire. C'est long, et c'est là que les erreurs se glissent.</a:t>
             </a:r>
@@ -2652,11 +2652,11 @@
             <a:r>
               <a:rPr lang="en-US" sz="1300" b="1" dirty="0">
                 <a:solidFill>
-                  <a:srgbClr val="0B0F19"/>
-                </a:solidFill>
-                <a:latin typeface="Inter" pitchFamily="34" charset="0"/>
-                <a:ea typeface="Inter" pitchFamily="34" charset="-122"/>
-                <a:cs typeface="Inter" pitchFamily="34" charset="-120"/>
+                  <a:srgbClr val="14181A"/>
+                </a:solidFill>
+                <a:latin typeface="Public Sans" pitchFamily="34" charset="0"/>
+                <a:ea typeface="Public Sans" pitchFamily="34" charset="-122"/>
+                <a:cs typeface="Public Sans" pitchFamily="34" charset="-120"/>
               </a:rPr>
               <a:t>Le plafond invisible. </a:t>
             </a:r>
@@ -2672,11 +2672,11 @@
             <a:r>
               <a:rPr lang="en-US" sz="1300" dirty="0">
                 <a:solidFill>
-                  <a:srgbClr val="3D4556"/>
-                </a:solidFill>
-                <a:latin typeface="Inter" pitchFamily="34" charset="0"/>
-                <a:ea typeface="Inter" pitchFamily="34" charset="-122"/>
-                <a:cs typeface="Inter" pitchFamily="34" charset="-120"/>
+                  <a:srgbClr val="3A423F"/>
+                </a:solidFill>
+                <a:latin typeface="Public Sans" pitchFamily="34" charset="0"/>
+                <a:ea typeface="Public Sans" pitchFamily="34" charset="-122"/>
+                <a:cs typeface="Public Sans" pitchFamily="34" charset="-120"/>
               </a:rPr>
               <a:t>Quand compter coûte du matériel et du temps de préparation, on compte moins souvent. Le stock dérive entre deux passages, et personne n'a décidé que ce serait ainsi.</a:t>
             </a:r>
@@ -2711,11 +2711,11 @@
             <a:r>
               <a:rPr lang="en-US" sz="900" dirty="0">
                 <a:solidFill>
-                  <a:srgbClr val="5B6475"/>
-                </a:solidFill>
-                <a:latin typeface="Inter" pitchFamily="34" charset="0"/>
-                <a:ea typeface="Inter" pitchFamily="34" charset="-122"/>
-                <a:cs typeface="Inter" pitchFamily="34" charset="-120"/>
+                  <a:srgbClr val="575F5C"/>
+                </a:solidFill>
+                <a:latin typeface="Public Sans" pitchFamily="34" charset="0"/>
+                <a:ea typeface="Public Sans" pitchFamily="34" charset="-122"/>
+                <a:cs typeface="Public Sans" pitchFamily="34" charset="-120"/>
               </a:rPr>
               <a:t>Quantinvo · l’essentiel</a:t>
             </a:r>
@@ -2750,11 +2750,11 @@
             <a:r>
               <a:rPr lang="en-US" sz="900" dirty="0">
                 <a:solidFill>
-                  <a:srgbClr val="5B6475"/>
-                </a:solidFill>
-                <a:latin typeface="Inter" pitchFamily="34" charset="0"/>
-                <a:ea typeface="Inter" pitchFamily="34" charset="-122"/>
-                <a:cs typeface="Inter" pitchFamily="34" charset="-120"/>
+                  <a:srgbClr val="575F5C"/>
+                </a:solidFill>
+                <a:latin typeface="Public Sans" pitchFamily="34" charset="0"/>
+                <a:ea typeface="Public Sans" pitchFamily="34" charset="-122"/>
+                <a:cs typeface="Public Sans" pitchFamily="34" charset="-120"/>
               </a:rPr>
               <a:t>2</a:t>
             </a:r>
@@ -2845,11 +2845,11 @@
             <a:r>
               <a:rPr lang="en-US" sz="1600" b="1" dirty="0">
                 <a:solidFill>
-                  <a:srgbClr val="0B0F19"/>
-                </a:solidFill>
-                <a:latin typeface="Sora" pitchFamily="34" charset="0"/>
-                <a:ea typeface="Sora" pitchFamily="34" charset="-122"/>
-                <a:cs typeface="Sora" pitchFamily="34" charset="-120"/>
+                  <a:srgbClr val="14181A"/>
+                </a:solidFill>
+                <a:latin typeface="Archivo" pitchFamily="34" charset="0"/>
+                <a:ea typeface="Archivo" pitchFamily="34" charset="-122"/>
+                <a:cs typeface="Archivo" pitchFamily="34" charset="-120"/>
               </a:rPr>
               <a:t>Quantinvo</a:t>
             </a:r>
@@ -2884,11 +2884,11 @@
             <a:r>
               <a:rPr lang="en-US" sz="1000" dirty="0">
                 <a:solidFill>
-                  <a:srgbClr val="5B6475"/>
-                </a:solidFill>
-                <a:latin typeface="Inter" pitchFamily="34" charset="0"/>
-                <a:ea typeface="Inter" pitchFamily="34" charset="-122"/>
-                <a:cs typeface="Inter" pitchFamily="34" charset="-120"/>
+                  <a:srgbClr val="575F5C"/>
+                </a:solidFill>
+                <a:latin typeface="Public Sans" pitchFamily="34" charset="0"/>
+                <a:ea typeface="Public Sans" pitchFamily="34" charset="-122"/>
+                <a:cs typeface="Public Sans" pitchFamily="34" charset="-120"/>
               </a:rPr>
               <a:t>Ce que c’est</a:t>
             </a:r>
@@ -2905,17 +2905,17 @@
         <p:spPr>
           <a:xfrm>
             <a:off x="731520" y="877824"/>
-            <a:ext cx="10725912" cy="25603"/>
+            <a:ext cx="10725912" cy="10973"/>
           </a:xfrm>
           <a:prstGeom prst="rect">
             <a:avLst/>
           </a:prstGeom>
           <a:solidFill>
-            <a:srgbClr val="38C9FF"/>
+            <a:srgbClr val="E2E5E1"/>
           </a:solidFill>
           <a:ln w="12700">
             <a:solidFill>
-              <a:srgbClr val="38C9FF"/>
+              <a:srgbClr val="E2E5E1"/>
             </a:solidFill>
             <a:prstDash val="solid"/>
           </a:ln>
@@ -2951,11 +2951,11 @@
             <a:r>
               <a:rPr lang="en-US" sz="2500" b="1" dirty="0">
                 <a:solidFill>
-                  <a:srgbClr val="4636B0"/>
-                </a:solidFill>
-                <a:latin typeface="Sora" pitchFamily="34" charset="0"/>
-                <a:ea typeface="Sora" pitchFamily="34" charset="-122"/>
-                <a:cs typeface="Sora" pitchFamily="34" charset="-120"/>
+                  <a:srgbClr val="14181A"/>
+                </a:solidFill>
+                <a:latin typeface="Archivo" pitchFamily="34" charset="0"/>
+                <a:ea typeface="Archivo" pitchFamily="34" charset="-122"/>
+                <a:cs typeface="Archivo" pitchFamily="34" charset="-120"/>
               </a:rPr>
               <a:t>Un outil d’inventaire complet, sur le téléphone qu’ils ont déjà</a:t>
             </a:r>
@@ -2993,11 +2993,11 @@
             <a:r>
               <a:rPr lang="en-US" sz="1350" b="1" dirty="0">
                 <a:solidFill>
-                  <a:srgbClr val="4636B0"/>
-                </a:solidFill>
-                <a:latin typeface="Sora" pitchFamily="34" charset="0"/>
-                <a:ea typeface="Sora" pitchFamily="34" charset="-122"/>
-                <a:cs typeface="Sora" pitchFamily="34" charset="-120"/>
+                  <a:srgbClr val="14181A"/>
+                </a:solidFill>
+                <a:latin typeface="Archivo" pitchFamily="34" charset="0"/>
+                <a:ea typeface="Archivo" pitchFamily="34" charset="-122"/>
+                <a:cs typeface="Archivo" pitchFamily="34" charset="-120"/>
               </a:rPr>
               <a:t>On imprime les balises</a:t>
             </a:r>
@@ -3035,11 +3035,11 @@
             <a:r>
               <a:rPr lang="en-US" sz="1100" dirty="0">
                 <a:solidFill>
-                  <a:srgbClr val="3D4556"/>
-                </a:solidFill>
-                <a:latin typeface="Inter" pitchFamily="34" charset="0"/>
-                <a:ea typeface="Inter" pitchFamily="34" charset="-122"/>
-                <a:cs typeface="Inter" pitchFamily="34" charset="-120"/>
+                  <a:srgbClr val="3A423F"/>
+                </a:solidFill>
+                <a:latin typeface="Public Sans" pitchFamily="34" charset="0"/>
+                <a:ea typeface="Public Sans" pitchFamily="34" charset="-122"/>
+                <a:cs typeface="Public Sans" pitchFamily="34" charset="-120"/>
               </a:rPr>
               <a:t>Une planche d'étiquettes numérotées, en PDF, imprimée depuis l'outil. Aucun matériel à réserver.</a:t>
             </a:r>
@@ -3060,15 +3060,15 @@
           </a:xfrm>
           <a:prstGeom prst="roundRect">
             <a:avLst>
-              <a:gd name="adj" fmla="val 3857"/>
+              <a:gd name="adj" fmla="val 1102"/>
             </a:avLst>
           </a:prstGeom>
           <a:solidFill>
-            <a:srgbClr val="F4F5F9"/>
+            <a:srgbClr val="F2F3F1"/>
           </a:solidFill>
           <a:ln w="12700">
             <a:solidFill>
-              <a:srgbClr val="F4F5F9"/>
+              <a:srgbClr val="F2F3F1"/>
             </a:solidFill>
             <a:prstDash val="solid"/>
           </a:ln>
@@ -3128,11 +3128,11 @@
             <a:r>
               <a:rPr lang="en-US" sz="1350" b="1" dirty="0">
                 <a:solidFill>
-                  <a:srgbClr val="4636B0"/>
-                </a:solidFill>
-                <a:latin typeface="Sora" pitchFamily="34" charset="0"/>
-                <a:ea typeface="Sora" pitchFamily="34" charset="-122"/>
-                <a:cs typeface="Sora" pitchFamily="34" charset="-120"/>
+                  <a:srgbClr val="14181A"/>
+                </a:solidFill>
+                <a:latin typeface="Archivo" pitchFamily="34" charset="0"/>
+                <a:ea typeface="Archivo" pitchFamily="34" charset="-122"/>
+                <a:cs typeface="Archivo" pitchFamily="34" charset="-120"/>
               </a:rPr>
               <a:t>On scanne la zone, puis les articles</a:t>
             </a:r>
@@ -3170,11 +3170,11 @@
             <a:r>
               <a:rPr lang="en-US" sz="1100" dirty="0">
                 <a:solidFill>
-                  <a:srgbClr val="3D4556"/>
-                </a:solidFill>
-                <a:latin typeface="Inter" pitchFamily="34" charset="0"/>
-                <a:ea typeface="Inter" pitchFamily="34" charset="-122"/>
-                <a:cs typeface="Inter" pitchFamily="34" charset="-120"/>
+                  <a:srgbClr val="3A423F"/>
+                </a:solidFill>
+                <a:latin typeface="Public Sans" pitchFamily="34" charset="0"/>
+                <a:ea typeface="Public Sans" pitchFamily="34" charset="-122"/>
+                <a:cs typeface="Public Sans" pitchFamily="34" charset="-120"/>
               </a:rPr>
               <a:t>La caméra du téléphone lit les codes-barres. Une douchette Bluetooth s'y branche pour les gros volumes.</a:t>
             </a:r>
@@ -3195,15 +3195,15 @@
           </a:xfrm>
           <a:prstGeom prst="roundRect">
             <a:avLst>
-              <a:gd name="adj" fmla="val 3857"/>
+              <a:gd name="adj" fmla="val 1102"/>
             </a:avLst>
           </a:prstGeom>
           <a:solidFill>
-            <a:srgbClr val="EEEEFC"/>
+            <a:srgbClr val="E7EDE9"/>
           </a:solidFill>
           <a:ln w="12700">
             <a:solidFill>
-              <a:srgbClr val="EEEEFC"/>
+              <a:srgbClr val="E7EDE9"/>
             </a:solidFill>
             <a:prstDash val="solid"/>
           </a:ln>
@@ -3263,11 +3263,11 @@
             <a:r>
               <a:rPr lang="en-US" sz="1350" b="1" dirty="0">
                 <a:solidFill>
-                  <a:srgbClr val="4636B0"/>
-                </a:solidFill>
-                <a:latin typeface="Sora" pitchFamily="34" charset="0"/>
-                <a:ea typeface="Sora" pitchFamily="34" charset="-122"/>
-                <a:cs typeface="Sora" pitchFamily="34" charset="-120"/>
+                  <a:srgbClr val="14181A"/>
+                </a:solidFill>
+                <a:latin typeface="Archivo" pitchFamily="34" charset="0"/>
+                <a:ea typeface="Archivo" pitchFamily="34" charset="-122"/>
+                <a:cs typeface="Archivo" pitchFamily="34" charset="-120"/>
               </a:rPr>
               <a:t>On audite et on tranche</a:t>
             </a:r>
@@ -3305,11 +3305,11 @@
             <a:r>
               <a:rPr lang="en-US" sz="1100" dirty="0">
                 <a:solidFill>
-                  <a:srgbClr val="3D4556"/>
-                </a:solidFill>
-                <a:latin typeface="Inter" pitchFamily="34" charset="0"/>
-                <a:ea typeface="Inter" pitchFamily="34" charset="-122"/>
-                <a:cs typeface="Inter" pitchFamily="34" charset="-120"/>
+                  <a:srgbClr val="3A423F"/>
+                </a:solidFill>
+                <a:latin typeface="Public Sans" pitchFamily="34" charset="0"/>
+                <a:ea typeface="Public Sans" pitchFamily="34" charset="-122"/>
+                <a:cs typeface="Public Sans" pitchFamily="34" charset="-120"/>
               </a:rPr>
               <a:t>Un second passage sur les zones qui le méritent. L'écart s'affiche, le superviseur décide au rayon.</a:t>
             </a:r>
@@ -3330,15 +3330,15 @@
           </a:xfrm>
           <a:prstGeom prst="roundRect">
             <a:avLst>
-              <a:gd name="adj" fmla="val 3857"/>
+              <a:gd name="adj" fmla="val 1102"/>
             </a:avLst>
           </a:prstGeom>
           <a:solidFill>
-            <a:srgbClr val="F4F5F9"/>
+            <a:srgbClr val="F2F3F1"/>
           </a:solidFill>
           <a:ln w="12700">
             <a:solidFill>
-              <a:srgbClr val="F4F5F9"/>
+              <a:srgbClr val="F2F3F1"/>
             </a:solidFill>
             <a:prstDash val="solid"/>
           </a:ln>
@@ -3395,11 +3395,11 @@
             <a:r>
               <a:rPr lang="en-US" sz="900" dirty="0">
                 <a:solidFill>
-                  <a:srgbClr val="5B6475"/>
-                </a:solidFill>
-                <a:latin typeface="Inter" pitchFamily="34" charset="0"/>
-                <a:ea typeface="Inter" pitchFamily="34" charset="-122"/>
-                <a:cs typeface="Inter" pitchFamily="34" charset="-120"/>
+                  <a:srgbClr val="575F5C"/>
+                </a:solidFill>
+                <a:latin typeface="Public Sans" pitchFamily="34" charset="0"/>
+                <a:ea typeface="Public Sans" pitchFamily="34" charset="-122"/>
+                <a:cs typeface="Public Sans" pitchFamily="34" charset="-120"/>
               </a:rPr>
               <a:t>Quantinvo · l’essentiel</a:t>
             </a:r>
@@ -3434,11 +3434,11 @@
             <a:r>
               <a:rPr lang="en-US" sz="900" dirty="0">
                 <a:solidFill>
-                  <a:srgbClr val="5B6475"/>
-                </a:solidFill>
-                <a:latin typeface="Inter" pitchFamily="34" charset="0"/>
-                <a:ea typeface="Inter" pitchFamily="34" charset="-122"/>
-                <a:cs typeface="Inter" pitchFamily="34" charset="-120"/>
+                  <a:srgbClr val="575F5C"/>
+                </a:solidFill>
+                <a:latin typeface="Public Sans" pitchFamily="34" charset="0"/>
+                <a:ea typeface="Public Sans" pitchFamily="34" charset="-122"/>
+                <a:cs typeface="Public Sans" pitchFamily="34" charset="-120"/>
               </a:rPr>
               <a:t>3</a:t>
             </a:r>
@@ -3529,11 +3529,11 @@
             <a:r>
               <a:rPr lang="en-US" sz="1600" b="1" dirty="0">
                 <a:solidFill>
-                  <a:srgbClr val="0B0F19"/>
-                </a:solidFill>
-                <a:latin typeface="Sora" pitchFamily="34" charset="0"/>
-                <a:ea typeface="Sora" pitchFamily="34" charset="-122"/>
-                <a:cs typeface="Sora" pitchFamily="34" charset="-120"/>
+                  <a:srgbClr val="14181A"/>
+                </a:solidFill>
+                <a:latin typeface="Archivo" pitchFamily="34" charset="0"/>
+                <a:ea typeface="Archivo" pitchFamily="34" charset="-122"/>
+                <a:cs typeface="Archivo" pitchFamily="34" charset="-120"/>
               </a:rPr>
               <a:t>Quantinvo</a:t>
             </a:r>
@@ -3568,11 +3568,11 @@
             <a:r>
               <a:rPr lang="en-US" sz="1000" dirty="0">
                 <a:solidFill>
-                  <a:srgbClr val="5B6475"/>
-                </a:solidFill>
-                <a:latin typeface="Inter" pitchFamily="34" charset="0"/>
-                <a:ea typeface="Inter" pitchFamily="34" charset="-122"/>
-                <a:cs typeface="Inter" pitchFamily="34" charset="-120"/>
+                  <a:srgbClr val="575F5C"/>
+                </a:solidFill>
+                <a:latin typeface="Public Sans" pitchFamily="34" charset="0"/>
+                <a:ea typeface="Public Sans" pitchFamily="34" charset="-122"/>
+                <a:cs typeface="Public Sans" pitchFamily="34" charset="-120"/>
               </a:rPr>
               <a:t>Face à face</a:t>
             </a:r>
@@ -3589,17 +3589,17 @@
         <p:spPr>
           <a:xfrm>
             <a:off x="731520" y="877824"/>
-            <a:ext cx="10725912" cy="25603"/>
+            <a:ext cx="10725912" cy="10973"/>
           </a:xfrm>
           <a:prstGeom prst="rect">
             <a:avLst/>
           </a:prstGeom>
           <a:solidFill>
-            <a:srgbClr val="38C9FF"/>
+            <a:srgbClr val="E2E5E1"/>
           </a:solidFill>
           <a:ln w="12700">
             <a:solidFill>
-              <a:srgbClr val="38C9FF"/>
+              <a:srgbClr val="E2E5E1"/>
             </a:solidFill>
             <a:prstDash val="solid"/>
           </a:ln>
@@ -3635,11 +3635,11 @@
             <a:r>
               <a:rPr lang="en-US" sz="2600" b="1" dirty="0">
                 <a:solidFill>
-                  <a:srgbClr val="4636B0"/>
-                </a:solidFill>
-                <a:latin typeface="Sora" pitchFamily="34" charset="0"/>
-                <a:ea typeface="Sora" pitchFamily="34" charset="-122"/>
-                <a:cs typeface="Sora" pitchFamily="34" charset="-120"/>
+                  <a:srgbClr val="14181A"/>
+                </a:solidFill>
+                <a:latin typeface="Archivo" pitchFamily="34" charset="0"/>
+                <a:ea typeface="Archivo" pitchFamily="34" charset="-122"/>
+                <a:cs typeface="Archivo" pitchFamily="34" charset="-120"/>
               </a:rPr>
               <a:t>Ce qui change, poste par poste</a:t>
             </a:r>
@@ -3674,11 +3674,11 @@
             <a:r>
               <a:rPr lang="en-US" sz="1050" b="1" dirty="0">
                 <a:solidFill>
-                  <a:srgbClr val="5B6475"/>
-                </a:solidFill>
-                <a:latin typeface="Inter" pitchFamily="34" charset="0"/>
-                <a:ea typeface="Inter" pitchFamily="34" charset="-122"/>
-                <a:cs typeface="Inter" pitchFamily="34" charset="-120"/>
+                  <a:srgbClr val="575F5C"/>
+                </a:solidFill>
+                <a:latin typeface="Public Sans" pitchFamily="34" charset="0"/>
+                <a:ea typeface="Public Sans" pitchFamily="34" charset="-122"/>
+                <a:cs typeface="Public Sans" pitchFamily="34" charset="-120"/>
               </a:rPr>
               <a:t>Une solution à terminaux dédiés</a:t>
             </a:r>
@@ -3713,11 +3713,11 @@
             <a:r>
               <a:rPr lang="en-US" sz="1050" b="1" dirty="0">
                 <a:solidFill>
-                  <a:srgbClr val="4636B0"/>
-                </a:solidFill>
-                <a:latin typeface="Inter" pitchFamily="34" charset="0"/>
-                <a:ea typeface="Inter" pitchFamily="34" charset="-122"/>
-                <a:cs typeface="Inter" pitchFamily="34" charset="-120"/>
+                  <a:srgbClr val="14181A"/>
+                </a:solidFill>
+                <a:latin typeface="Public Sans" pitchFamily="34" charset="0"/>
+                <a:ea typeface="Public Sans" pitchFamily="34" charset="-122"/>
+                <a:cs typeface="Public Sans" pitchFamily="34" charset="-120"/>
               </a:rPr>
               <a:t>Quantinvo</a:t>
             </a:r>
@@ -3742,7 +3742,7 @@
           <a:noFill/>
           <a:ln w="9525">
             <a:solidFill>
-              <a:srgbClr val="E3E6EE"/>
+              <a:srgbClr val="E2E5E1"/>
             </a:solidFill>
             <a:prstDash val="solid"/>
           </a:ln>
@@ -3778,11 +3778,11 @@
             <a:r>
               <a:rPr lang="en-US" sz="1150" dirty="0">
                 <a:solidFill>
-                  <a:srgbClr val="3D4556"/>
-                </a:solidFill>
-                <a:latin typeface="Inter" pitchFamily="34" charset="0"/>
-                <a:ea typeface="Inter" pitchFamily="34" charset="-122"/>
-                <a:cs typeface="Inter" pitchFamily="34" charset="-120"/>
+                  <a:srgbClr val="3A423F"/>
+                </a:solidFill>
+                <a:latin typeface="Public Sans" pitchFamily="34" charset="0"/>
+                <a:ea typeface="Public Sans" pitchFamily="34" charset="-122"/>
+                <a:cs typeface="Public Sans" pitchFamily="34" charset="-120"/>
               </a:rPr>
               <a:t>Une flotte à acheter ou louer, charger, configurer, réparer.</a:t>
             </a:r>
@@ -3820,11 +3820,11 @@
             <a:r>
               <a:rPr lang="en-US" sz="1150" dirty="0">
                 <a:solidFill>
-                  <a:srgbClr val="0B0F19"/>
-                </a:solidFill>
-                <a:latin typeface="Inter" pitchFamily="34" charset="0"/>
-                <a:ea typeface="Inter" pitchFamily="34" charset="-122"/>
-                <a:cs typeface="Inter" pitchFamily="34" charset="-120"/>
+                  <a:srgbClr val="14181A"/>
+                </a:solidFill>
+                <a:latin typeface="Public Sans" pitchFamily="34" charset="0"/>
+                <a:ea typeface="Public Sans" pitchFamily="34" charset="-122"/>
+                <a:cs typeface="Public Sans" pitchFamily="34" charset="-120"/>
               </a:rPr>
               <a:t>Les téléphones de vos équipes. Déjà là, déjà payés.</a:t>
             </a:r>
@@ -3849,7 +3849,7 @@
           <a:noFill/>
           <a:ln w="9525">
             <a:solidFill>
-              <a:srgbClr val="E3E6EE"/>
+              <a:srgbClr val="E2E5E1"/>
             </a:solidFill>
             <a:prstDash val="solid"/>
           </a:ln>
@@ -3885,11 +3885,11 @@
             <a:r>
               <a:rPr lang="en-US" sz="1150" dirty="0">
                 <a:solidFill>
-                  <a:srgbClr val="3D4556"/>
-                </a:solidFill>
-                <a:latin typeface="Inter" pitchFamily="34" charset="0"/>
-                <a:ea typeface="Inter" pitchFamily="34" charset="-122"/>
-                <a:cs typeface="Inter" pitchFamily="34" charset="-120"/>
+                  <a:srgbClr val="3A423F"/>
+                </a:solidFill>
+                <a:latin typeface="Public Sans" pitchFamily="34" charset="0"/>
+                <a:ea typeface="Public Sans" pitchFamily="34" charset="-122"/>
+                <a:cs typeface="Public Sans" pitchFamily="34" charset="-120"/>
               </a:rPr>
               <a:t>Des terminaux à connecter et vérifier un par un avant chaque session.</a:t>
             </a:r>
@@ -3927,11 +3927,11 @@
             <a:r>
               <a:rPr lang="en-US" sz="1150" dirty="0">
                 <a:solidFill>
-                  <a:srgbClr val="0B0F19"/>
-                </a:solidFill>
-                <a:latin typeface="Inter" pitchFamily="34" charset="0"/>
-                <a:ea typeface="Inter" pitchFamily="34" charset="-122"/>
-                <a:cs typeface="Inter" pitchFamily="34" charset="-120"/>
+                  <a:srgbClr val="14181A"/>
+                </a:solidFill>
+                <a:latin typeface="Public Sans" pitchFamily="34" charset="0"/>
+                <a:ea typeface="Public Sans" pitchFamily="34" charset="-122"/>
+                <a:cs typeface="Public Sans" pitchFamily="34" charset="-120"/>
               </a:rPr>
               <a:t>Chacun rejoint l’inventaire depuis son téléphone, en quelques secondes.</a:t>
             </a:r>
@@ -3956,7 +3956,7 @@
           <a:noFill/>
           <a:ln w="9525">
             <a:solidFill>
-              <a:srgbClr val="E3E6EE"/>
+              <a:srgbClr val="E2E5E1"/>
             </a:solidFill>
             <a:prstDash val="solid"/>
           </a:ln>
@@ -3992,11 +3992,11 @@
             <a:r>
               <a:rPr lang="en-US" sz="1150" dirty="0">
                 <a:solidFill>
-                  <a:srgbClr val="3D4556"/>
-                </a:solidFill>
-                <a:latin typeface="Inter" pitchFamily="34" charset="0"/>
-                <a:ea typeface="Inter" pitchFamily="34" charset="-122"/>
-                <a:cs typeface="Inter" pitchFamily="34" charset="-120"/>
+                  <a:srgbClr val="3A423F"/>
+                </a:solidFill>
+                <a:latin typeface="Public Sans" pitchFamily="34" charset="0"/>
+                <a:ea typeface="Public Sans" pitchFamily="34" charset="-122"/>
+                <a:cs typeface="Public Sans" pitchFamily="34" charset="-120"/>
               </a:rPr>
               <a:t>Un briefing sur le maniement du matériel à chaque inventaire.</a:t>
             </a:r>
@@ -4034,11 +4034,11 @@
             <a:r>
               <a:rPr lang="en-US" sz="1150" dirty="0">
                 <a:solidFill>
-                  <a:srgbClr val="0B0F19"/>
-                </a:solidFill>
-                <a:latin typeface="Inter" pitchFamily="34" charset="0"/>
-                <a:ea typeface="Inter" pitchFamily="34" charset="-122"/>
-                <a:cs typeface="Inter" pitchFamily="34" charset="-120"/>
+                  <a:srgbClr val="14181A"/>
+                </a:solidFill>
+                <a:latin typeface="Public Sans" pitchFamily="34" charset="0"/>
+                <a:ea typeface="Public Sans" pitchFamily="34" charset="-122"/>
+                <a:cs typeface="Public Sans" pitchFamily="34" charset="-120"/>
               </a:rPr>
               <a:t>Le geste qu’ils connaissent déjà : ouvrir, scanner, scanner.</a:t>
             </a:r>
@@ -4063,7 +4063,7 @@
           <a:noFill/>
           <a:ln w="9525">
             <a:solidFill>
-              <a:srgbClr val="E3E6EE"/>
+              <a:srgbClr val="E2E5E1"/>
             </a:solidFill>
             <a:prstDash val="solid"/>
           </a:ln>
@@ -4099,11 +4099,11 @@
             <a:r>
               <a:rPr lang="en-US" sz="1150" dirty="0">
                 <a:solidFill>
-                  <a:srgbClr val="3D4556"/>
-                </a:solidFill>
-                <a:latin typeface="Inter" pitchFamily="34" charset="0"/>
-                <a:ea typeface="Inter" pitchFamily="34" charset="-122"/>
-                <a:cs typeface="Inter" pitchFamily="34" charset="-120"/>
+                  <a:srgbClr val="3A423F"/>
+                </a:solidFill>
+                <a:latin typeface="Public Sans" pitchFamily="34" charset="0"/>
+                <a:ea typeface="Public Sans" pitchFamily="34" charset="-122"/>
+                <a:cs typeface="Public Sans" pitchFamily="34" charset="-120"/>
               </a:rPr>
               <a:t>Un rapport de variance, à consolider ensuite avec le stock théorique.</a:t>
             </a:r>
@@ -4141,11 +4141,11 @@
             <a:r>
               <a:rPr lang="en-US" sz="1150" dirty="0">
                 <a:solidFill>
-                  <a:srgbClr val="0B0F19"/>
-                </a:solidFill>
-                <a:latin typeface="Inter" pitchFamily="34" charset="0"/>
-                <a:ea typeface="Inter" pitchFamily="34" charset="-122"/>
-                <a:cs typeface="Inter" pitchFamily="34" charset="-120"/>
+                  <a:srgbClr val="14181A"/>
+                </a:solidFill>
+                <a:latin typeface="Public Sans" pitchFamily="34" charset="0"/>
+                <a:ea typeface="Public Sans" pitchFamily="34" charset="-122"/>
+                <a:cs typeface="Public Sans" pitchFamily="34" charset="-120"/>
               </a:rPr>
               <a:t>Le croisement est déjà fait : l’attendu, le compté, le non-compté, l’écart en valeur.</a:t>
             </a:r>
@@ -4170,7 +4170,7 @@
           <a:noFill/>
           <a:ln w="9525">
             <a:solidFill>
-              <a:srgbClr val="E3E6EE"/>
+              <a:srgbClr val="E2E5E1"/>
             </a:solidFill>
             <a:prstDash val="solid"/>
           </a:ln>
@@ -4206,11 +4206,11 @@
             <a:r>
               <a:rPr lang="en-US" sz="1150" dirty="0">
                 <a:solidFill>
-                  <a:srgbClr val="3D4556"/>
-                </a:solidFill>
-                <a:latin typeface="Inter" pitchFamily="34" charset="0"/>
-                <a:ea typeface="Inter" pitchFamily="34" charset="-122"/>
-                <a:cs typeface="Inter" pitchFamily="34" charset="-120"/>
+                  <a:srgbClr val="3A423F"/>
+                </a:solidFill>
+                <a:latin typeface="Public Sans" pitchFamily="34" charset="0"/>
+                <a:ea typeface="Public Sans" pitchFamily="34" charset="-122"/>
+                <a:cs typeface="Public Sans" pitchFamily="34" charset="-120"/>
               </a:rPr>
               <a:t>Un prix sur devis, renégocié chaque année.</a:t>
             </a:r>
@@ -4248,11 +4248,11 @@
             <a:r>
               <a:rPr lang="en-US" sz="1150" dirty="0">
                 <a:solidFill>
-                  <a:srgbClr val="0B0F19"/>
-                </a:solidFill>
-                <a:latin typeface="Inter" pitchFamily="34" charset="0"/>
-                <a:ea typeface="Inter" pitchFamily="34" charset="-122"/>
-                <a:cs typeface="Inter" pitchFamily="34" charset="-120"/>
+                  <a:srgbClr val="14181A"/>
+                </a:solidFill>
+                <a:latin typeface="Public Sans" pitchFamily="34" charset="0"/>
+                <a:ea typeface="Public Sans" pitchFamily="34" charset="-122"/>
+                <a:cs typeface="Public Sans" pitchFamily="34" charset="-120"/>
               </a:rPr>
               <a:t>Un prix affiché, le même pour tout le monde, souscrit en ligne.</a:t>
             </a:r>
@@ -4277,7 +4277,7 @@
           <a:noFill/>
           <a:ln w="9525">
             <a:solidFill>
-              <a:srgbClr val="E3E6EE"/>
+              <a:srgbClr val="E2E5E1"/>
             </a:solidFill>
             <a:prstDash val="solid"/>
           </a:ln>
@@ -4313,11 +4313,11 @@
             <a:r>
               <a:rPr lang="en-US" sz="1150" dirty="0">
                 <a:solidFill>
-                  <a:srgbClr val="3D4556"/>
-                </a:solidFill>
-                <a:latin typeface="Inter" pitchFamily="34" charset="0"/>
-                <a:ea typeface="Inter" pitchFamily="34" charset="-122"/>
-                <a:cs typeface="Inter" pitchFamily="34" charset="-120"/>
+                  <a:srgbClr val="3A423F"/>
+                </a:solidFill>
+                <a:latin typeface="Public Sans" pitchFamily="34" charset="0"/>
+                <a:ea typeface="Public Sans" pitchFamily="34" charset="-122"/>
+                <a:cs typeface="Public Sans" pitchFamily="34" charset="-120"/>
               </a:rPr>
               <a:t>Un module au catalogue d’un géant du matériel.</a:t>
             </a:r>
@@ -4355,11 +4355,11 @@
             <a:r>
               <a:rPr lang="en-US" sz="1150" dirty="0">
                 <a:solidFill>
-                  <a:srgbClr val="0B0F19"/>
-                </a:solidFill>
-                <a:latin typeface="Inter" pitchFamily="34" charset="0"/>
-                <a:ea typeface="Inter" pitchFamily="34" charset="-122"/>
-                <a:cs typeface="Inter" pitchFamily="34" charset="-120"/>
+                  <a:srgbClr val="14181A"/>
+                </a:solidFill>
+                <a:latin typeface="Public Sans" pitchFamily="34" charset="0"/>
+                <a:ea typeface="Public Sans" pitchFamily="34" charset="-122"/>
+                <a:cs typeface="Public Sans" pitchFamily="34" charset="-120"/>
               </a:rPr>
               <a:t>Un outil qui ne fait qu’une chose, et son auteur répond lui-même.</a:t>
             </a:r>
@@ -4384,7 +4384,7 @@
           <a:noFill/>
           <a:ln w="9525">
             <a:solidFill>
-              <a:srgbClr val="E3E6EE"/>
+              <a:srgbClr val="E2E5E1"/>
             </a:solidFill>
             <a:prstDash val="solid"/>
           </a:ln>
@@ -4417,11 +4417,11 @@
             <a:r>
               <a:rPr lang="en-US" sz="900" dirty="0">
                 <a:solidFill>
-                  <a:srgbClr val="5B6475"/>
-                </a:solidFill>
-                <a:latin typeface="Inter" pitchFamily="34" charset="0"/>
-                <a:ea typeface="Inter" pitchFamily="34" charset="-122"/>
-                <a:cs typeface="Inter" pitchFamily="34" charset="-120"/>
+                  <a:srgbClr val="575F5C"/>
+                </a:solidFill>
+                <a:latin typeface="Public Sans" pitchFamily="34" charset="0"/>
+                <a:ea typeface="Public Sans" pitchFamily="34" charset="-122"/>
+                <a:cs typeface="Public Sans" pitchFamily="34" charset="-120"/>
               </a:rPr>
               <a:t>Quantinvo · l’essentiel</a:t>
             </a:r>
@@ -4456,11 +4456,11 @@
             <a:r>
               <a:rPr lang="en-US" sz="900" dirty="0">
                 <a:solidFill>
-                  <a:srgbClr val="5B6475"/>
-                </a:solidFill>
-                <a:latin typeface="Inter" pitchFamily="34" charset="0"/>
-                <a:ea typeface="Inter" pitchFamily="34" charset="-122"/>
-                <a:cs typeface="Inter" pitchFamily="34" charset="-120"/>
+                  <a:srgbClr val="575F5C"/>
+                </a:solidFill>
+                <a:latin typeface="Public Sans" pitchFamily="34" charset="0"/>
+                <a:ea typeface="Public Sans" pitchFamily="34" charset="-122"/>
+                <a:cs typeface="Public Sans" pitchFamily="34" charset="-120"/>
               </a:rPr>
               <a:t>4</a:t>
             </a:r>
@@ -4551,11 +4551,11 @@
             <a:r>
               <a:rPr lang="en-US" sz="1600" b="1" dirty="0">
                 <a:solidFill>
-                  <a:srgbClr val="0B0F19"/>
-                </a:solidFill>
-                <a:latin typeface="Sora" pitchFamily="34" charset="0"/>
-                <a:ea typeface="Sora" pitchFamily="34" charset="-122"/>
-                <a:cs typeface="Sora" pitchFamily="34" charset="-120"/>
+                  <a:srgbClr val="14181A"/>
+                </a:solidFill>
+                <a:latin typeface="Archivo" pitchFamily="34" charset="0"/>
+                <a:ea typeface="Archivo" pitchFamily="34" charset="-122"/>
+                <a:cs typeface="Archivo" pitchFamily="34" charset="-120"/>
               </a:rPr>
               <a:t>Quantinvo</a:t>
             </a:r>
@@ -4590,11 +4590,11 @@
             <a:r>
               <a:rPr lang="en-US" sz="1000" dirty="0">
                 <a:solidFill>
-                  <a:srgbClr val="5B6475"/>
-                </a:solidFill>
-                <a:latin typeface="Inter" pitchFamily="34" charset="0"/>
-                <a:ea typeface="Inter" pitchFamily="34" charset="-122"/>
-                <a:cs typeface="Inter" pitchFamily="34" charset="-120"/>
+                  <a:srgbClr val="575F5C"/>
+                </a:solidFill>
+                <a:latin typeface="Public Sans" pitchFamily="34" charset="0"/>
+                <a:ea typeface="Public Sans" pitchFamily="34" charset="-122"/>
+                <a:cs typeface="Public Sans" pitchFamily="34" charset="-120"/>
               </a:rPr>
               <a:t>Pendant le comptage</a:t>
             </a:r>
@@ -4611,17 +4611,17 @@
         <p:spPr>
           <a:xfrm>
             <a:off x="731520" y="877824"/>
-            <a:ext cx="10725912" cy="25603"/>
+            <a:ext cx="10725912" cy="10973"/>
           </a:xfrm>
           <a:prstGeom prst="rect">
             <a:avLst/>
           </a:prstGeom>
           <a:solidFill>
-            <a:srgbClr val="38C9FF"/>
+            <a:srgbClr val="E2E5E1"/>
           </a:solidFill>
           <a:ln w="12700">
             <a:solidFill>
-              <a:srgbClr val="38C9FF"/>
+              <a:srgbClr val="E2E5E1"/>
             </a:solidFill>
             <a:prstDash val="solid"/>
           </a:ln>
@@ -4657,11 +4657,11 @@
             <a:r>
               <a:rPr lang="en-US" sz="2600" b="1" dirty="0">
                 <a:solidFill>
-                  <a:srgbClr val="4636B0"/>
-                </a:solidFill>
-                <a:latin typeface="Sora" pitchFamily="34" charset="0"/>
-                <a:ea typeface="Sora" pitchFamily="34" charset="-122"/>
-                <a:cs typeface="Sora" pitchFamily="34" charset="-120"/>
+                  <a:srgbClr val="14181A"/>
+                </a:solidFill>
+                <a:latin typeface="Archivo" pitchFamily="34" charset="0"/>
+                <a:ea typeface="Archivo" pitchFamily="34" charset="-122"/>
+                <a:cs typeface="Archivo" pitchFamily="34" charset="-120"/>
               </a:rPr>
               <a:t>Personne n’est posté devant un écran pour surveiller.</a:t>
             </a:r>
@@ -4699,11 +4699,11 @@
             <a:r>
               <a:rPr lang="en-US" sz="1250" dirty="0">
                 <a:solidFill>
-                  <a:srgbClr val="3D4556"/>
-                </a:solidFill>
-                <a:latin typeface="Inter" pitchFamily="34" charset="0"/>
-                <a:ea typeface="Inter" pitchFamily="34" charset="-122"/>
-                <a:cs typeface="Inter" pitchFamily="34" charset="-120"/>
+                  <a:srgbClr val="3A423F"/>
+                </a:solidFill>
+                <a:latin typeface="Public Sans" pitchFamily="34" charset="0"/>
+                <a:ea typeface="Public Sans" pitchFamily="34" charset="-122"/>
+                <a:cs typeface="Public Sans" pitchFamily="34" charset="-120"/>
               </a:rPr>
               <a:t>L'avancement zone par zone, les appareils en comptage et en audit, les derniers scans : le superviseur ouvre la page quand il veut, depuis le bureau ou depuis le rayon. Ce qu'on ne voit pas, et c'est voulu : qui fait quoi. Le suivi est agrégé — on pilote le travail, pas les personnes.</a:t>
             </a:r>
@@ -4724,7 +4724,7 @@
           </a:xfrm>
           <a:prstGeom prst="roundRect">
             <a:avLst>
-              <a:gd name="adj" fmla="val 2339"/>
+              <a:gd name="adj" fmla="val 1170"/>
             </a:avLst>
           </a:prstGeom>
           <a:solidFill>
@@ -4732,7 +4732,7 @@
           </a:solidFill>
           <a:ln w="12700">
             <a:solidFill>
-              <a:srgbClr val="E3E6EE"/>
+              <a:srgbClr val="E2E5E1"/>
             </a:solidFill>
             <a:prstDash val="solid"/>
           </a:ln>
@@ -4789,11 +4789,11 @@
             <a:r>
               <a:rPr lang="en-US" sz="1000" i="1" dirty="0">
                 <a:solidFill>
-                  <a:srgbClr val="5B6475"/>
-                </a:solidFill>
-                <a:latin typeface="Inter" pitchFamily="34" charset="0"/>
-                <a:ea typeface="Inter" pitchFamily="34" charset="-122"/>
-                <a:cs typeface="Inter" pitchFamily="34" charset="-120"/>
+                  <a:srgbClr val="575F5C"/>
+                </a:solidFill>
+                <a:latin typeface="Public Sans" pitchFamily="34" charset="0"/>
+                <a:ea typeface="Public Sans" pitchFamily="34" charset="-122"/>
+                <a:cs typeface="Public Sans" pitchFamily="34" charset="-120"/>
               </a:rPr>
               <a:t>Onglet Suivi, données d’essai.</a:t>
             </a:r>
@@ -4828,11 +4828,11 @@
             <a:r>
               <a:rPr lang="en-US" sz="900" dirty="0">
                 <a:solidFill>
-                  <a:srgbClr val="5B6475"/>
-                </a:solidFill>
-                <a:latin typeface="Inter" pitchFamily="34" charset="0"/>
-                <a:ea typeface="Inter" pitchFamily="34" charset="-122"/>
-                <a:cs typeface="Inter" pitchFamily="34" charset="-120"/>
+                  <a:srgbClr val="575F5C"/>
+                </a:solidFill>
+                <a:latin typeface="Public Sans" pitchFamily="34" charset="0"/>
+                <a:ea typeface="Public Sans" pitchFamily="34" charset="-122"/>
+                <a:cs typeface="Public Sans" pitchFamily="34" charset="-120"/>
               </a:rPr>
               <a:t>Quantinvo · l’essentiel</a:t>
             </a:r>
@@ -4867,11 +4867,11 @@
             <a:r>
               <a:rPr lang="en-US" sz="900" dirty="0">
                 <a:solidFill>
-                  <a:srgbClr val="5B6475"/>
-                </a:solidFill>
-                <a:latin typeface="Inter" pitchFamily="34" charset="0"/>
-                <a:ea typeface="Inter" pitchFamily="34" charset="-122"/>
-                <a:cs typeface="Inter" pitchFamily="34" charset="-120"/>
+                  <a:srgbClr val="575F5C"/>
+                </a:solidFill>
+                <a:latin typeface="Public Sans" pitchFamily="34" charset="0"/>
+                <a:ea typeface="Public Sans" pitchFamily="34" charset="-122"/>
+                <a:cs typeface="Public Sans" pitchFamily="34" charset="-120"/>
               </a:rPr>
               <a:t>5</a:t>
             </a:r>
@@ -4962,11 +4962,11 @@
             <a:r>
               <a:rPr lang="en-US" sz="1600" b="1" dirty="0">
                 <a:solidFill>
-                  <a:srgbClr val="0B0F19"/>
-                </a:solidFill>
-                <a:latin typeface="Sora" pitchFamily="34" charset="0"/>
-                <a:ea typeface="Sora" pitchFamily="34" charset="-122"/>
-                <a:cs typeface="Sora" pitchFamily="34" charset="-120"/>
+                  <a:srgbClr val="14181A"/>
+                </a:solidFill>
+                <a:latin typeface="Archivo" pitchFamily="34" charset="0"/>
+                <a:ea typeface="Archivo" pitchFamily="34" charset="-122"/>
+                <a:cs typeface="Archivo" pitchFamily="34" charset="-120"/>
               </a:rPr>
               <a:t>Quantinvo</a:t>
             </a:r>
@@ -5001,11 +5001,11 @@
             <a:r>
               <a:rPr lang="en-US" sz="1000" dirty="0">
                 <a:solidFill>
-                  <a:srgbClr val="5B6475"/>
-                </a:solidFill>
-                <a:latin typeface="Inter" pitchFamily="34" charset="0"/>
-                <a:ea typeface="Inter" pitchFamily="34" charset="-122"/>
-                <a:cs typeface="Inter" pitchFamily="34" charset="-120"/>
+                  <a:srgbClr val="575F5C"/>
+                </a:solidFill>
+                <a:latin typeface="Public Sans" pitchFamily="34" charset="0"/>
+                <a:ea typeface="Public Sans" pitchFamily="34" charset="-122"/>
+                <a:cs typeface="Public Sans" pitchFamily="34" charset="-120"/>
               </a:rPr>
               <a:t>Après le comptage</a:t>
             </a:r>
@@ -5022,17 +5022,17 @@
         <p:spPr>
           <a:xfrm>
             <a:off x="731520" y="877824"/>
-            <a:ext cx="10725912" cy="25603"/>
+            <a:ext cx="10725912" cy="10973"/>
           </a:xfrm>
           <a:prstGeom prst="rect">
             <a:avLst/>
           </a:prstGeom>
           <a:solidFill>
-            <a:srgbClr val="38C9FF"/>
+            <a:srgbClr val="E2E5E1"/>
           </a:solidFill>
           <a:ln w="12700">
             <a:solidFill>
-              <a:srgbClr val="38C9FF"/>
+              <a:srgbClr val="E2E5E1"/>
             </a:solidFill>
             <a:prstDash val="solid"/>
           </a:ln>
@@ -5068,11 +5068,11 @@
             <a:r>
               <a:rPr lang="en-US" sz="2300" b="1" dirty="0">
                 <a:solidFill>
-                  <a:srgbClr val="4636B0"/>
-                </a:solidFill>
-                <a:latin typeface="Sora" pitchFamily="34" charset="0"/>
-                <a:ea typeface="Sora" pitchFamily="34" charset="-122"/>
-                <a:cs typeface="Sora" pitchFamily="34" charset="-120"/>
+                  <a:srgbClr val="14181A"/>
+                </a:solidFill>
+                <a:latin typeface="Archivo" pitchFamily="34" charset="0"/>
+                <a:ea typeface="Archivo" pitchFamily="34" charset="-122"/>
+                <a:cs typeface="Archivo" pitchFamily="34" charset="-120"/>
               </a:rPr>
               <a:t>Le rapport arrive déjà croisé avec votre stock théorique.</a:t>
             </a:r>
@@ -5113,11 +5113,11 @@
             <a:r>
               <a:rPr lang="en-US" sz="1250" dirty="0">
                 <a:solidFill>
-                  <a:srgbClr val="3D4556"/>
-                </a:solidFill>
-                <a:latin typeface="Inter" pitchFamily="34" charset="0"/>
-                <a:ea typeface="Inter" pitchFamily="34" charset="-122"/>
-                <a:cs typeface="Inter" pitchFamily="34" charset="-120"/>
+                  <a:srgbClr val="3A423F"/>
+                </a:solidFill>
+                <a:latin typeface="Public Sans" pitchFamily="34" charset="0"/>
+                <a:ea typeface="Public Sans" pitchFamily="34" charset="-122"/>
+                <a:cs typeface="Public Sans" pitchFamily="34" charset="-120"/>
               </a:rPr>
               <a:t>Il part de l'attendu, pas seulement de ce qui a été scanné : un article attendu et jamais trouvé y figure, avec son manque. C'est la démarque que l'inventaire est censé révéler.</a:t>
             </a:r>
@@ -5136,11 +5136,11 @@
             <a:r>
               <a:rPr lang="en-US" sz="1250" dirty="0">
                 <a:solidFill>
-                  <a:srgbClr val="3D4556"/>
-                </a:solidFill>
-                <a:latin typeface="Inter" pitchFamily="34" charset="0"/>
-                <a:ea typeface="Inter" pitchFamily="34" charset="-122"/>
-                <a:cs typeface="Inter" pitchFamily="34" charset="-120"/>
+                  <a:srgbClr val="3A423F"/>
+                </a:solidFill>
+                <a:latin typeface="Public Sans" pitchFamily="34" charset="0"/>
+                <a:ea typeface="Public Sans" pitchFamily="34" charset="-122"/>
+                <a:cs typeface="Public Sans" pitchFamily="34" charset="-120"/>
               </a:rPr>
               <a:t>Export Excel en un clic, prêt pour la correction du stock. Il ne reste que la validation et l'ajustement.</a:t>
             </a:r>
@@ -5161,7 +5161,7 @@
           </a:xfrm>
           <a:prstGeom prst="roundRect">
             <a:avLst>
-              <a:gd name="adj" fmla="val 1717"/>
+              <a:gd name="adj" fmla="val 859"/>
             </a:avLst>
           </a:prstGeom>
           <a:solidFill>
@@ -5169,7 +5169,7 @@
           </a:solidFill>
           <a:ln w="12700">
             <a:solidFill>
-              <a:srgbClr val="E3E6EE"/>
+              <a:srgbClr val="E2E5E1"/>
             </a:solidFill>
             <a:prstDash val="solid"/>
           </a:ln>
@@ -5226,11 +5226,11 @@
             <a:r>
               <a:rPr lang="en-US" sz="1000" i="1" dirty="0">
                 <a:solidFill>
-                  <a:srgbClr val="5B6475"/>
-                </a:solidFill>
-                <a:latin typeface="Inter" pitchFamily="34" charset="0"/>
-                <a:ea typeface="Inter" pitchFamily="34" charset="-122"/>
-                <a:cs typeface="Inter" pitchFamily="34" charset="-120"/>
+                  <a:srgbClr val="575F5C"/>
+                </a:solidFill>
+                <a:latin typeface="Public Sans" pitchFamily="34" charset="0"/>
+                <a:ea typeface="Public Sans" pitchFamily="34" charset="-122"/>
+                <a:cs typeface="Public Sans" pitchFamily="34" charset="-120"/>
               </a:rPr>
               <a:t>Onglet Rapport, données d’essai.</a:t>
             </a:r>
@@ -5265,11 +5265,11 @@
             <a:r>
               <a:rPr lang="en-US" sz="900" dirty="0">
                 <a:solidFill>
-                  <a:srgbClr val="5B6475"/>
-                </a:solidFill>
-                <a:latin typeface="Inter" pitchFamily="34" charset="0"/>
-                <a:ea typeface="Inter" pitchFamily="34" charset="-122"/>
-                <a:cs typeface="Inter" pitchFamily="34" charset="-120"/>
+                  <a:srgbClr val="575F5C"/>
+                </a:solidFill>
+                <a:latin typeface="Public Sans" pitchFamily="34" charset="0"/>
+                <a:ea typeface="Public Sans" pitchFamily="34" charset="-122"/>
+                <a:cs typeface="Public Sans" pitchFamily="34" charset="-120"/>
               </a:rPr>
               <a:t>Quantinvo · l’essentiel</a:t>
             </a:r>
@@ -5304,11 +5304,11 @@
             <a:r>
               <a:rPr lang="en-US" sz="900" dirty="0">
                 <a:solidFill>
-                  <a:srgbClr val="5B6475"/>
-                </a:solidFill>
-                <a:latin typeface="Inter" pitchFamily="34" charset="0"/>
-                <a:ea typeface="Inter" pitchFamily="34" charset="-122"/>
-                <a:cs typeface="Inter" pitchFamily="34" charset="-120"/>
+                  <a:srgbClr val="575F5C"/>
+                </a:solidFill>
+                <a:latin typeface="Public Sans" pitchFamily="34" charset="0"/>
+                <a:ea typeface="Public Sans" pitchFamily="34" charset="-122"/>
+                <a:cs typeface="Public Sans" pitchFamily="34" charset="-120"/>
               </a:rPr>
               <a:t>6</a:t>
             </a:r>
@@ -5399,11 +5399,11 @@
             <a:r>
               <a:rPr lang="en-US" sz="1600" b="1" dirty="0">
                 <a:solidFill>
-                  <a:srgbClr val="0B0F19"/>
-                </a:solidFill>
-                <a:latin typeface="Sora" pitchFamily="34" charset="0"/>
-                <a:ea typeface="Sora" pitchFamily="34" charset="-122"/>
-                <a:cs typeface="Sora" pitchFamily="34" charset="-120"/>
+                  <a:srgbClr val="14181A"/>
+                </a:solidFill>
+                <a:latin typeface="Archivo" pitchFamily="34" charset="0"/>
+                <a:ea typeface="Archivo" pitchFamily="34" charset="-122"/>
+                <a:cs typeface="Archivo" pitchFamily="34" charset="-120"/>
               </a:rPr>
               <a:t>Quantinvo</a:t>
             </a:r>
@@ -5438,11 +5438,11 @@
             <a:r>
               <a:rPr lang="en-US" sz="1000" dirty="0">
                 <a:solidFill>
-                  <a:srgbClr val="5B6475"/>
-                </a:solidFill>
-                <a:latin typeface="Inter" pitchFamily="34" charset="0"/>
-                <a:ea typeface="Inter" pitchFamily="34" charset="-122"/>
-                <a:cs typeface="Inter" pitchFamily="34" charset="-120"/>
+                  <a:srgbClr val="575F5C"/>
+                </a:solidFill>
+                <a:latin typeface="Public Sans" pitchFamily="34" charset="0"/>
+                <a:ea typeface="Public Sans" pitchFamily="34" charset="-122"/>
+                <a:cs typeface="Public Sans" pitchFamily="34" charset="-120"/>
               </a:rPr>
               <a:t>Le prix</a:t>
             </a:r>
@@ -5459,17 +5459,17 @@
         <p:spPr>
           <a:xfrm>
             <a:off x="731520" y="877824"/>
-            <a:ext cx="10725912" cy="25603"/>
+            <a:ext cx="10725912" cy="10973"/>
           </a:xfrm>
           <a:prstGeom prst="rect">
             <a:avLst/>
           </a:prstGeom>
           <a:solidFill>
-            <a:srgbClr val="38C9FF"/>
+            <a:srgbClr val="E2E5E1"/>
           </a:solidFill>
           <a:ln w="12700">
             <a:solidFill>
-              <a:srgbClr val="38C9FF"/>
+              <a:srgbClr val="E2E5E1"/>
             </a:solidFill>
             <a:prstDash val="solid"/>
           </a:ln>
@@ -5505,11 +5505,11 @@
             <a:r>
               <a:rPr lang="en-US" sz="2500" b="1" dirty="0">
                 <a:solidFill>
-                  <a:srgbClr val="4636B0"/>
-                </a:solidFill>
-                <a:latin typeface="Sora" pitchFamily="34" charset="0"/>
-                <a:ea typeface="Sora" pitchFamily="34" charset="-122"/>
-                <a:cs typeface="Sora" pitchFamily="34" charset="-120"/>
+                  <a:srgbClr val="14181A"/>
+                </a:solidFill>
+                <a:latin typeface="Archivo" pitchFamily="34" charset="0"/>
+                <a:ea typeface="Archivo" pitchFamily="34" charset="-122"/>
+                <a:cs typeface="Archivo" pitchFamily="34" charset="-120"/>
               </a:rPr>
               <a:t>Affiché, par magasin, sans déclaration de stock</a:t>
             </a:r>
@@ -5547,11 +5547,11 @@
             <a:r>
               <a:rPr lang="en-US" sz="1150" dirty="0">
                 <a:solidFill>
-                  <a:srgbClr val="5B6475"/>
-                </a:solidFill>
-                <a:latin typeface="Inter" pitchFamily="34" charset="0"/>
-                <a:ea typeface="Inter" pitchFamily="34" charset="-122"/>
-                <a:cs typeface="Inter" pitchFamily="34" charset="-120"/>
+                  <a:srgbClr val="575F5C"/>
+                </a:solidFill>
+                <a:latin typeface="Public Sans" pitchFamily="34" charset="0"/>
+                <a:ea typeface="Public Sans" pitchFamily="34" charset="-122"/>
+                <a:cs typeface="Public Sans" pitchFamily="34" charset="-120"/>
               </a:rPr>
               <a:t>Le prix suit le nombre d'appareils qui comptent en même temps — la seule chose que vous puissiez vérifier vous-même. Ni le volume de votre stock, ni le nombre de comptes, ni le nombre d'inventaires dans l'année.</a:t>
             </a:r>
@@ -5572,15 +5572,15 @@
           </a:xfrm>
           <a:prstGeom prst="roundRect">
             <a:avLst>
-              <a:gd name="adj" fmla="val 4000"/>
+              <a:gd name="adj" fmla="val 1333"/>
             </a:avLst>
           </a:prstGeom>
           <a:solidFill>
-            <a:srgbClr val="FFFFFF"/>
+            <a:srgbClr val="F2F3F1"/>
           </a:solidFill>
           <a:ln w="12700">
             <a:solidFill>
-              <a:srgbClr val="E3E6EE"/>
+              <a:srgbClr val="F2F3F1"/>
             </a:solidFill>
             <a:prstDash val="solid"/>
           </a:ln>
@@ -5613,11 +5613,11 @@
             <a:r>
               <a:rPr lang="en-US" sz="1800" b="1" dirty="0">
                 <a:solidFill>
-                  <a:srgbClr val="0B0F19"/>
-                </a:solidFill>
-                <a:latin typeface="Sora" pitchFamily="34" charset="0"/>
-                <a:ea typeface="Sora" pitchFamily="34" charset="-122"/>
-                <a:cs typeface="Sora" pitchFamily="34" charset="-120"/>
+                  <a:srgbClr val="14181A"/>
+                </a:solidFill>
+                <a:latin typeface="Archivo" pitchFamily="34" charset="0"/>
+                <a:ea typeface="Archivo" pitchFamily="34" charset="-122"/>
+                <a:cs typeface="Archivo" pitchFamily="34" charset="-120"/>
               </a:rPr>
               <a:t>Essential</a:t>
             </a:r>
@@ -5652,13 +5652,13 @@
             <a:r>
               <a:rPr lang="en-US" sz="1100" b="1" dirty="0">
                 <a:solidFill>
-                  <a:srgbClr val="6366F1"/>
-                </a:solidFill>
-                <a:latin typeface="Inter" pitchFamily="34" charset="0"/>
-                <a:ea typeface="Inter" pitchFamily="34" charset="-122"/>
-                <a:cs typeface="Inter" pitchFamily="34" charset="-120"/>
-              </a:rPr>
-              <a:t>2 appareils</a:t>
+                  <a:srgbClr val="1E4D3B"/>
+                </a:solidFill>
+                <a:latin typeface="Public Sans" pitchFamily="34" charset="0"/>
+                <a:ea typeface="Public Sans" pitchFamily="34" charset="-122"/>
+                <a:cs typeface="Public Sans" pitchFamily="34" charset="-120"/>
+              </a:rPr>
+              <a:t>Jusqu’à 2 appareils</a:t>
             </a:r>
             <a:endParaRPr lang="en-US" sz="1100" dirty="0"/>
           </a:p>
@@ -5694,11 +5694,11 @@
             <a:r>
               <a:rPr lang="en-US" sz="1000" dirty="0">
                 <a:solidFill>
-                  <a:srgbClr val="5B6475"/>
-                </a:solidFill>
-                <a:latin typeface="Inter" pitchFamily="34" charset="0"/>
-                <a:ea typeface="Inter" pitchFamily="34" charset="-122"/>
-                <a:cs typeface="Inter" pitchFamily="34" charset="-120"/>
+                  <a:srgbClr val="575F5C"/>
+                </a:solidFill>
+                <a:latin typeface="Public Sans" pitchFamily="34" charset="0"/>
+                <a:ea typeface="Public Sans" pitchFamily="34" charset="-122"/>
+                <a:cs typeface="Public Sans" pitchFamily="34" charset="-120"/>
               </a:rPr>
               <a:t>Vous comptez seul ou à deux, dans un magasin.</a:t>
             </a:r>
@@ -5733,11 +5733,11 @@
             <a:r>
               <a:rPr lang="en-US" sz="2600" b="1" dirty="0">
                 <a:solidFill>
-                  <a:srgbClr val="4636B0"/>
-                </a:solidFill>
-                <a:latin typeface="Sora" pitchFamily="34" charset="0"/>
-                <a:ea typeface="Sora" pitchFamily="34" charset="-122"/>
-                <a:cs typeface="Sora" pitchFamily="34" charset="-120"/>
+                  <a:srgbClr val="14181A"/>
+                </a:solidFill>
+                <a:latin typeface="Archivo" pitchFamily="34" charset="0"/>
+                <a:ea typeface="Archivo" pitchFamily="34" charset="-122"/>
+                <a:cs typeface="Archivo" pitchFamily="34" charset="-120"/>
               </a:rPr>
               <a:t>89 €</a:t>
             </a:r>
@@ -5747,11 +5747,11 @@
             <a:r>
               <a:rPr lang="en-US" sz="1050" dirty="0">
                 <a:solidFill>
-                  <a:srgbClr val="5B6475"/>
-                </a:solidFill>
-                <a:latin typeface="Inter" pitchFamily="34" charset="0"/>
-                <a:ea typeface="Inter" pitchFamily="34" charset="-122"/>
-                <a:cs typeface="Inter" pitchFamily="34" charset="-120"/>
+                  <a:srgbClr val="575F5C"/>
+                </a:solidFill>
+                <a:latin typeface="Public Sans" pitchFamily="34" charset="0"/>
+                <a:ea typeface="Public Sans" pitchFamily="34" charset="-122"/>
+                <a:cs typeface="Public Sans" pitchFamily="34" charset="-120"/>
               </a:rPr>
               <a:t>  HT / mois</a:t>
             </a:r>
@@ -5786,11 +5786,11 @@
             <a:r>
               <a:rPr lang="en-US" sz="950" dirty="0">
                 <a:solidFill>
-                  <a:srgbClr val="1F7A5C"/>
-                </a:solidFill>
-                <a:latin typeface="Inter" pitchFamily="34" charset="0"/>
-                <a:ea typeface="Inter" pitchFamily="34" charset="-122"/>
-                <a:cs typeface="Inter" pitchFamily="34" charset="-120"/>
+                  <a:srgbClr val="15704F"/>
+                </a:solidFill>
+                <a:latin typeface="Public Sans" pitchFamily="34" charset="0"/>
+                <a:ea typeface="Public Sans" pitchFamily="34" charset="-122"/>
+                <a:cs typeface="Public Sans" pitchFamily="34" charset="-120"/>
               </a:rPr>
               <a:t>ou 950 € à l’année — 118 € de moins</a:t>
             </a:r>
@@ -5811,15 +5811,15 @@
           </a:xfrm>
           <a:prstGeom prst="roundRect">
             <a:avLst>
-              <a:gd name="adj" fmla="val 4000"/>
+              <a:gd name="adj" fmla="val 1333"/>
             </a:avLst>
           </a:prstGeom>
           <a:solidFill>
-            <a:srgbClr val="EEEEFC"/>
+            <a:srgbClr val="E7EDE9"/>
           </a:solidFill>
-          <a:ln w="19050">
+          <a:ln w="15875">
             <a:solidFill>
-              <a:srgbClr val="6366F1"/>
+              <a:srgbClr val="1E4D3B"/>
             </a:solidFill>
             <a:prstDash val="solid"/>
           </a:ln>
@@ -5852,11 +5852,11 @@
             <a:r>
               <a:rPr lang="en-US" sz="800" b="1" spc="60" kern="0" dirty="0">
                 <a:solidFill>
-                  <a:srgbClr val="6366F1"/>
-                </a:solidFill>
-                <a:latin typeface="Inter" pitchFamily="34" charset="0"/>
-                <a:ea typeface="Inter" pitchFamily="34" charset="-122"/>
-                <a:cs typeface="Inter" pitchFamily="34" charset="-120"/>
+                  <a:srgbClr val="1E4D3B"/>
+                </a:solidFill>
+                <a:latin typeface="Public Sans" pitchFamily="34" charset="0"/>
+                <a:ea typeface="Public Sans" pitchFamily="34" charset="-122"/>
+                <a:cs typeface="Public Sans" pitchFamily="34" charset="-120"/>
               </a:rPr>
               <a:t>LE PLUS COURANT</a:t>
             </a:r>
@@ -5891,11 +5891,11 @@
             <a:r>
               <a:rPr lang="en-US" sz="1800" b="1" dirty="0">
                 <a:solidFill>
-                  <a:srgbClr val="0B0F19"/>
-                </a:solidFill>
-                <a:latin typeface="Sora" pitchFamily="34" charset="0"/>
-                <a:ea typeface="Sora" pitchFamily="34" charset="-122"/>
-                <a:cs typeface="Sora" pitchFamily="34" charset="-120"/>
+                  <a:srgbClr val="14181A"/>
+                </a:solidFill>
+                <a:latin typeface="Archivo" pitchFamily="34" charset="0"/>
+                <a:ea typeface="Archivo" pitchFamily="34" charset="-122"/>
+                <a:cs typeface="Archivo" pitchFamily="34" charset="-120"/>
               </a:rPr>
               <a:t>Advanced</a:t>
             </a:r>
@@ -5930,13 +5930,13 @@
             <a:r>
               <a:rPr lang="en-US" sz="1100" b="1" dirty="0">
                 <a:solidFill>
-                  <a:srgbClr val="6366F1"/>
-                </a:solidFill>
-                <a:latin typeface="Inter" pitchFamily="34" charset="0"/>
-                <a:ea typeface="Inter" pitchFamily="34" charset="-122"/>
-                <a:cs typeface="Inter" pitchFamily="34" charset="-120"/>
-              </a:rPr>
-              <a:t>3 à 20 appareils</a:t>
+                  <a:srgbClr val="1E4D3B"/>
+                </a:solidFill>
+                <a:latin typeface="Public Sans" pitchFamily="34" charset="0"/>
+                <a:ea typeface="Public Sans" pitchFamily="34" charset="-122"/>
+                <a:cs typeface="Public Sans" pitchFamily="34" charset="-120"/>
+              </a:rPr>
+              <a:t>Jusqu’à 20 appareils</a:t>
             </a:r>
             <a:endParaRPr lang="en-US" sz="1100" dirty="0"/>
           </a:p>
@@ -5972,11 +5972,11 @@
             <a:r>
               <a:rPr lang="en-US" sz="1000" dirty="0">
                 <a:solidFill>
-                  <a:srgbClr val="5B6475"/>
-                </a:solidFill>
-                <a:latin typeface="Inter" pitchFamily="34" charset="0"/>
-                <a:ea typeface="Inter" pitchFamily="34" charset="-122"/>
-                <a:cs typeface="Inter" pitchFamily="34" charset="-120"/>
+                  <a:srgbClr val="575F5C"/>
+                </a:solidFill>
+                <a:latin typeface="Public Sans" pitchFamily="34" charset="0"/>
+                <a:ea typeface="Public Sans" pitchFamily="34" charset="-122"/>
+                <a:cs typeface="Public Sans" pitchFamily="34" charset="-120"/>
               </a:rPr>
               <a:t>Vous montez une équipe le jour de l’inventaire.</a:t>
             </a:r>
@@ -6011,11 +6011,11 @@
             <a:r>
               <a:rPr lang="en-US" sz="2600" b="1" dirty="0">
                 <a:solidFill>
-                  <a:srgbClr val="4636B0"/>
-                </a:solidFill>
-                <a:latin typeface="Sora" pitchFamily="34" charset="0"/>
-                <a:ea typeface="Sora" pitchFamily="34" charset="-122"/>
-                <a:cs typeface="Sora" pitchFamily="34" charset="-120"/>
+                  <a:srgbClr val="14181A"/>
+                </a:solidFill>
+                <a:latin typeface="Archivo" pitchFamily="34" charset="0"/>
+                <a:ea typeface="Archivo" pitchFamily="34" charset="-122"/>
+                <a:cs typeface="Archivo" pitchFamily="34" charset="-120"/>
               </a:rPr>
               <a:t>310 €</a:t>
             </a:r>
@@ -6025,11 +6025,11 @@
             <a:r>
               <a:rPr lang="en-US" sz="1050" dirty="0">
                 <a:solidFill>
-                  <a:srgbClr val="5B6475"/>
-                </a:solidFill>
-                <a:latin typeface="Inter" pitchFamily="34" charset="0"/>
-                <a:ea typeface="Inter" pitchFamily="34" charset="-122"/>
-                <a:cs typeface="Inter" pitchFamily="34" charset="-120"/>
+                  <a:srgbClr val="575F5C"/>
+                </a:solidFill>
+                <a:latin typeface="Public Sans" pitchFamily="34" charset="0"/>
+                <a:ea typeface="Public Sans" pitchFamily="34" charset="-122"/>
+                <a:cs typeface="Public Sans" pitchFamily="34" charset="-120"/>
               </a:rPr>
               <a:t>  HT / mois</a:t>
             </a:r>
@@ -6064,11 +6064,11 @@
             <a:r>
               <a:rPr lang="en-US" sz="950" dirty="0">
                 <a:solidFill>
-                  <a:srgbClr val="1F7A5C"/>
-                </a:solidFill>
-                <a:latin typeface="Inter" pitchFamily="34" charset="0"/>
-                <a:ea typeface="Inter" pitchFamily="34" charset="-122"/>
-                <a:cs typeface="Inter" pitchFamily="34" charset="-120"/>
+                  <a:srgbClr val="15704F"/>
+                </a:solidFill>
+                <a:latin typeface="Public Sans" pitchFamily="34" charset="0"/>
+                <a:ea typeface="Public Sans" pitchFamily="34" charset="-122"/>
+                <a:cs typeface="Public Sans" pitchFamily="34" charset="-120"/>
               </a:rPr>
               <a:t>ou 3 300 € à l’année — 420 € de moins</a:t>
             </a:r>
@@ -6089,15 +6089,15 @@
           </a:xfrm>
           <a:prstGeom prst="roundRect">
             <a:avLst>
-              <a:gd name="adj" fmla="val 4000"/>
+              <a:gd name="adj" fmla="val 1333"/>
             </a:avLst>
           </a:prstGeom>
           <a:solidFill>
-            <a:srgbClr val="FFFFFF"/>
+            <a:srgbClr val="F2F3F1"/>
           </a:solidFill>
           <a:ln w="12700">
             <a:solidFill>
-              <a:srgbClr val="E3E6EE"/>
+              <a:srgbClr val="F2F3F1"/>
             </a:solidFill>
             <a:prstDash val="solid"/>
           </a:ln>
@@ -6130,11 +6130,11 @@
             <a:r>
               <a:rPr lang="en-US" sz="1800" b="1" dirty="0">
                 <a:solidFill>
-                  <a:srgbClr val="0B0F19"/>
-                </a:solidFill>
-                <a:latin typeface="Sora" pitchFamily="34" charset="0"/>
-                <a:ea typeface="Sora" pitchFamily="34" charset="-122"/>
-                <a:cs typeface="Sora" pitchFamily="34" charset="-120"/>
+                  <a:srgbClr val="14181A"/>
+                </a:solidFill>
+                <a:latin typeface="Archivo" pitchFamily="34" charset="0"/>
+                <a:ea typeface="Archivo" pitchFamily="34" charset="-122"/>
+                <a:cs typeface="Archivo" pitchFamily="34" charset="-120"/>
               </a:rPr>
               <a:t>Enterprise</a:t>
             </a:r>
@@ -6169,13 +6169,13 @@
             <a:r>
               <a:rPr lang="en-US" sz="1100" b="1" dirty="0">
                 <a:solidFill>
-                  <a:srgbClr val="6366F1"/>
-                </a:solidFill>
-                <a:latin typeface="Inter" pitchFamily="34" charset="0"/>
-                <a:ea typeface="Inter" pitchFamily="34" charset="-122"/>
-                <a:cs typeface="Inter" pitchFamily="34" charset="-120"/>
-              </a:rPr>
-              <a:t>21 à 100 appareils</a:t>
+                  <a:srgbClr val="1E4D3B"/>
+                </a:solidFill>
+                <a:latin typeface="Public Sans" pitchFamily="34" charset="0"/>
+                <a:ea typeface="Public Sans" pitchFamily="34" charset="-122"/>
+                <a:cs typeface="Public Sans" pitchFamily="34" charset="-120"/>
+              </a:rPr>
+              <a:t>Jusqu’à 100 appareils</a:t>
             </a:r>
             <a:endParaRPr lang="en-US" sz="1100" dirty="0"/>
           </a:p>
@@ -6211,11 +6211,11 @@
             <a:r>
               <a:rPr lang="en-US" sz="1000" dirty="0">
                 <a:solidFill>
-                  <a:srgbClr val="5B6475"/>
-                </a:solidFill>
-                <a:latin typeface="Inter" pitchFamily="34" charset="0"/>
-                <a:ea typeface="Inter" pitchFamily="34" charset="-122"/>
-                <a:cs typeface="Inter" pitchFamily="34" charset="-120"/>
+                  <a:srgbClr val="575F5C"/>
+                </a:solidFill>
+                <a:latin typeface="Public Sans" pitchFamily="34" charset="0"/>
+                <a:ea typeface="Public Sans" pitchFamily="34" charset="-122"/>
+                <a:cs typeface="Public Sans" pitchFamily="34" charset="-120"/>
               </a:rPr>
               <a:t>La grande surface, qui mobilise une équipe entière.</a:t>
             </a:r>
@@ -6250,11 +6250,11 @@
             <a:r>
               <a:rPr lang="en-US" sz="2600" b="1" dirty="0">
                 <a:solidFill>
-                  <a:srgbClr val="4636B0"/>
-                </a:solidFill>
-                <a:latin typeface="Sora" pitchFamily="34" charset="0"/>
-                <a:ea typeface="Sora" pitchFamily="34" charset="-122"/>
-                <a:cs typeface="Sora" pitchFamily="34" charset="-120"/>
+                  <a:srgbClr val="14181A"/>
+                </a:solidFill>
+                <a:latin typeface="Archivo" pitchFamily="34" charset="0"/>
+                <a:ea typeface="Archivo" pitchFamily="34" charset="-122"/>
+                <a:cs typeface="Archivo" pitchFamily="34" charset="-120"/>
               </a:rPr>
               <a:t>890 €</a:t>
             </a:r>
@@ -6264,11 +6264,11 @@
             <a:r>
               <a:rPr lang="en-US" sz="1050" dirty="0">
                 <a:solidFill>
-                  <a:srgbClr val="5B6475"/>
-                </a:solidFill>
-                <a:latin typeface="Inter" pitchFamily="34" charset="0"/>
-                <a:ea typeface="Inter" pitchFamily="34" charset="-122"/>
-                <a:cs typeface="Inter" pitchFamily="34" charset="-120"/>
+                  <a:srgbClr val="575F5C"/>
+                </a:solidFill>
+                <a:latin typeface="Public Sans" pitchFamily="34" charset="0"/>
+                <a:ea typeface="Public Sans" pitchFamily="34" charset="-122"/>
+                <a:cs typeface="Public Sans" pitchFamily="34" charset="-120"/>
               </a:rPr>
               <a:t>  HT / mois</a:t>
             </a:r>
@@ -6303,11 +6303,11 @@
             <a:r>
               <a:rPr lang="en-US" sz="950" dirty="0">
                 <a:solidFill>
-                  <a:srgbClr val="1F7A5C"/>
-                </a:solidFill>
-                <a:latin typeface="Inter" pitchFamily="34" charset="0"/>
-                <a:ea typeface="Inter" pitchFamily="34" charset="-122"/>
-                <a:cs typeface="Inter" pitchFamily="34" charset="-120"/>
+                  <a:srgbClr val="15704F"/>
+                </a:solidFill>
+                <a:latin typeface="Public Sans" pitchFamily="34" charset="0"/>
+                <a:ea typeface="Public Sans" pitchFamily="34" charset="-122"/>
+                <a:cs typeface="Public Sans" pitchFamily="34" charset="-120"/>
               </a:rPr>
               <a:t>ou 9 450 € à l’année — 1 230 € de moins</a:t>
             </a:r>
@@ -6328,15 +6328,15 @@
           </a:xfrm>
           <a:prstGeom prst="roundRect">
             <a:avLst>
-              <a:gd name="adj" fmla="val 8421"/>
+              <a:gd name="adj" fmla="val 4211"/>
             </a:avLst>
           </a:prstGeom>
           <a:solidFill>
-            <a:srgbClr val="F4F5F9"/>
+            <a:srgbClr val="F2F3F1"/>
           </a:solidFill>
           <a:ln w="12700">
             <a:solidFill>
-              <a:srgbClr val="F4F5F9"/>
+              <a:srgbClr val="F2F3F1"/>
             </a:solidFill>
             <a:prstDash val="solid"/>
           </a:ln>
@@ -6369,11 +6369,11 @@
             <a:r>
               <a:rPr lang="en-US" sz="950" b="1" dirty="0">
                 <a:solidFill>
-                  <a:srgbClr val="5B6475"/>
-                </a:solidFill>
-                <a:latin typeface="Inter" pitchFamily="34" charset="0"/>
-                <a:ea typeface="Inter" pitchFamily="34" charset="-122"/>
-                <a:cs typeface="Inter" pitchFamily="34" charset="-120"/>
+                  <a:srgbClr val="575F5C"/>
+                </a:solidFill>
+                <a:latin typeface="Public Sans" pitchFamily="34" charset="0"/>
+                <a:ea typeface="Public Sans" pitchFamily="34" charset="-122"/>
+                <a:cs typeface="Public Sans" pitchFamily="34" charset="-120"/>
               </a:rPr>
               <a:t>Ce qui n’est pas dans ce prix, parce que ça n’existe pas</a:t>
             </a:r>
@@ -6411,11 +6411,11 @@
             <a:r>
               <a:rPr lang="en-US" sz="1150" i="1" dirty="0">
                 <a:solidFill>
-                  <a:srgbClr val="3D4556"/>
-                </a:solidFill>
-                <a:latin typeface="Inter" pitchFamily="34" charset="0"/>
-                <a:ea typeface="Inter" pitchFamily="34" charset="-122"/>
-                <a:cs typeface="Inter" pitchFamily="34" charset="-120"/>
+                  <a:srgbClr val="3A423F"/>
+                </a:solidFill>
+                <a:latin typeface="Public Sans" pitchFamily="34" charset="0"/>
+                <a:ea typeface="Public Sans" pitchFamily="34" charset="-122"/>
+                <a:cs typeface="Public Sans" pitchFamily="34" charset="-120"/>
               </a:rPr>
               <a:t>Aucun terminal, aucune installation, aucun serveur, aucun coût de mise en service. Vous souscrivez en ligne et vous comptez le jour même.</a:t>
             </a:r>
@@ -6450,11 +6450,11 @@
             <a:r>
               <a:rPr lang="en-US" sz="900" dirty="0">
                 <a:solidFill>
-                  <a:srgbClr val="5B6475"/>
-                </a:solidFill>
-                <a:latin typeface="Inter" pitchFamily="34" charset="0"/>
-                <a:ea typeface="Inter" pitchFamily="34" charset="-122"/>
-                <a:cs typeface="Inter" pitchFamily="34" charset="-120"/>
+                  <a:srgbClr val="575F5C"/>
+                </a:solidFill>
+                <a:latin typeface="Public Sans" pitchFamily="34" charset="0"/>
+                <a:ea typeface="Public Sans" pitchFamily="34" charset="-122"/>
+                <a:cs typeface="Public Sans" pitchFamily="34" charset="-120"/>
               </a:rPr>
               <a:t>Quantinvo · l’essentiel</a:t>
             </a:r>
@@ -6489,11 +6489,11 @@
             <a:r>
               <a:rPr lang="en-US" sz="900" dirty="0">
                 <a:solidFill>
-                  <a:srgbClr val="5B6475"/>
-                </a:solidFill>
-                <a:latin typeface="Inter" pitchFamily="34" charset="0"/>
-                <a:ea typeface="Inter" pitchFamily="34" charset="-122"/>
-                <a:cs typeface="Inter" pitchFamily="34" charset="-120"/>
+                  <a:srgbClr val="575F5C"/>
+                </a:solidFill>
+                <a:latin typeface="Public Sans" pitchFamily="34" charset="0"/>
+                <a:ea typeface="Public Sans" pitchFamily="34" charset="-122"/>
+                <a:cs typeface="Public Sans" pitchFamily="34" charset="-120"/>
               </a:rPr>
               <a:t>7</a:t>
             </a:r>
@@ -6584,11 +6584,11 @@
             <a:r>
               <a:rPr lang="en-US" sz="1600" b="1" dirty="0">
                 <a:solidFill>
-                  <a:srgbClr val="0B0F19"/>
-                </a:solidFill>
-                <a:latin typeface="Sora" pitchFamily="34" charset="0"/>
-                <a:ea typeface="Sora" pitchFamily="34" charset="-122"/>
-                <a:cs typeface="Sora" pitchFamily="34" charset="-120"/>
+                  <a:srgbClr val="14181A"/>
+                </a:solidFill>
+                <a:latin typeface="Archivo" pitchFamily="34" charset="0"/>
+                <a:ea typeface="Archivo" pitchFamily="34" charset="-122"/>
+                <a:cs typeface="Archivo" pitchFamily="34" charset="-120"/>
               </a:rPr>
               <a:t>Quantinvo</a:t>
             </a:r>
@@ -6623,11 +6623,11 @@
             <a:r>
               <a:rPr lang="en-US" sz="1000" dirty="0">
                 <a:solidFill>
-                  <a:srgbClr val="5B6475"/>
-                </a:solidFill>
-                <a:latin typeface="Inter" pitchFamily="34" charset="0"/>
-                <a:ea typeface="Inter" pitchFamily="34" charset="-122"/>
-                <a:cs typeface="Inter" pitchFamily="34" charset="-120"/>
+                  <a:srgbClr val="575F5C"/>
+                </a:solidFill>
+                <a:latin typeface="Public Sans" pitchFamily="34" charset="0"/>
+                <a:ea typeface="Public Sans" pitchFamily="34" charset="-122"/>
+                <a:cs typeface="Public Sans" pitchFamily="34" charset="-120"/>
               </a:rPr>
               <a:t>Pour être honnête</a:t>
             </a:r>
@@ -6644,17 +6644,17 @@
         <p:spPr>
           <a:xfrm>
             <a:off x="731520" y="877824"/>
-            <a:ext cx="10725912" cy="25603"/>
+            <a:ext cx="10725912" cy="10973"/>
           </a:xfrm>
           <a:prstGeom prst="rect">
             <a:avLst/>
           </a:prstGeom>
           <a:solidFill>
-            <a:srgbClr val="38C9FF"/>
+            <a:srgbClr val="E2E5E1"/>
           </a:solidFill>
           <a:ln w="12700">
             <a:solidFill>
-              <a:srgbClr val="38C9FF"/>
+              <a:srgbClr val="E2E5E1"/>
             </a:solidFill>
             <a:prstDash val="solid"/>
           </a:ln>
@@ -6690,11 +6690,11 @@
             <a:r>
               <a:rPr lang="en-US" sz="2600" b="1" dirty="0">
                 <a:solidFill>
-                  <a:srgbClr val="4636B0"/>
-                </a:solidFill>
-                <a:latin typeface="Sora" pitchFamily="34" charset="0"/>
-                <a:ea typeface="Sora" pitchFamily="34" charset="-122"/>
-                <a:cs typeface="Sora" pitchFamily="34" charset="-120"/>
+                  <a:srgbClr val="14181A"/>
+                </a:solidFill>
+                <a:latin typeface="Archivo" pitchFamily="34" charset="0"/>
+                <a:ea typeface="Archivo" pitchFamily="34" charset="-122"/>
+                <a:cs typeface="Archivo" pitchFamily="34" charset="-120"/>
               </a:rPr>
               <a:t>Ce qu’un terminal durci fait mieux qu’un téléphone.</a:t>
             </a:r>
@@ -6732,11 +6732,11 @@
             <a:r>
               <a:rPr lang="en-US" sz="1250" i="1" dirty="0">
                 <a:solidFill>
-                  <a:srgbClr val="5B6475"/>
-                </a:solidFill>
-                <a:latin typeface="Inter" pitchFamily="34" charset="0"/>
-                <a:ea typeface="Inter" pitchFamily="34" charset="-122"/>
-                <a:cs typeface="Inter" pitchFamily="34" charset="-120"/>
+                  <a:srgbClr val="575F5C"/>
+                </a:solidFill>
+                <a:latin typeface="Public Sans" pitchFamily="34" charset="0"/>
+                <a:ea typeface="Public Sans" pitchFamily="34" charset="-122"/>
+                <a:cs typeface="Public Sans" pitchFamily="34" charset="-120"/>
               </a:rPr>
               <a:t>Si on ne le dit pas nous-mêmes, quelqu'un le dira à notre place — et moins bien.</a:t>
             </a:r>
@@ -6777,11 +6777,11 @@
             <a:r>
               <a:rPr lang="en-US" sz="1300" b="1" dirty="0">
                 <a:solidFill>
-                  <a:srgbClr val="0B0F19"/>
-                </a:solidFill>
-                <a:latin typeface="Inter" pitchFamily="34" charset="0"/>
-                <a:ea typeface="Inter" pitchFamily="34" charset="-122"/>
-                <a:cs typeface="Inter" pitchFamily="34" charset="-120"/>
+                  <a:srgbClr val="14181A"/>
+                </a:solidFill>
+                <a:latin typeface="Public Sans" pitchFamily="34" charset="0"/>
+                <a:ea typeface="Public Sans" pitchFamily="34" charset="-122"/>
+                <a:cs typeface="Public Sans" pitchFamily="34" charset="-120"/>
               </a:rPr>
               <a:t>Il encaisse les chocs. </a:t>
             </a:r>
@@ -6797,11 +6797,11 @@
             <a:r>
               <a:rPr lang="en-US" sz="1300" dirty="0">
                 <a:solidFill>
-                  <a:srgbClr val="3D4556"/>
-                </a:solidFill>
-                <a:latin typeface="Inter" pitchFamily="34" charset="0"/>
-                <a:ea typeface="Inter" pitchFamily="34" charset="-122"/>
-                <a:cs typeface="Inter" pitchFamily="34" charset="-120"/>
+                  <a:srgbClr val="3A423F"/>
+                </a:solidFill>
+                <a:latin typeface="Public Sans" pitchFamily="34" charset="0"/>
+                <a:ea typeface="Public Sans" pitchFamily="34" charset="-122"/>
+                <a:cs typeface="Public Sans" pitchFamily="34" charset="-120"/>
               </a:rPr>
               <a:t>Une chute de deux mètres sur un sol de réserve, un écran gelé à −20 °C : un terminal durci est fait pour ça, un téléphone non. Dans une chambre froide ou sur un quai, l'argument est réel.</a:t>
             </a:r>
@@ -6820,11 +6820,11 @@
             <a:r>
               <a:rPr lang="en-US" sz="1300" b="1" dirty="0">
                 <a:solidFill>
-                  <a:srgbClr val="0B0F19"/>
-                </a:solidFill>
-                <a:latin typeface="Inter" pitchFamily="34" charset="0"/>
-                <a:ea typeface="Inter" pitchFamily="34" charset="-122"/>
-                <a:cs typeface="Inter" pitchFamily="34" charset="-120"/>
+                  <a:srgbClr val="14181A"/>
+                </a:solidFill>
+                <a:latin typeface="Public Sans" pitchFamily="34" charset="0"/>
+                <a:ea typeface="Public Sans" pitchFamily="34" charset="-122"/>
+                <a:cs typeface="Public Sans" pitchFamily="34" charset="-120"/>
               </a:rPr>
               <a:t>La batterie tient la journée entière. </a:t>
             </a:r>
@@ -6840,11 +6840,11 @@
             <a:r>
               <a:rPr lang="en-US" sz="1300" dirty="0">
                 <a:solidFill>
-                  <a:srgbClr val="3D4556"/>
-                </a:solidFill>
-                <a:latin typeface="Inter" pitchFamily="34" charset="0"/>
-                <a:ea typeface="Inter" pitchFamily="34" charset="-122"/>
-                <a:cs typeface="Inter" pitchFamily="34" charset="-120"/>
+                  <a:srgbClr val="3A423F"/>
+                </a:solidFill>
+                <a:latin typeface="Public Sans" pitchFamily="34" charset="0"/>
+                <a:ea typeface="Public Sans" pitchFamily="34" charset="-122"/>
+                <a:cs typeface="Public Sans" pitchFamily="34" charset="-120"/>
               </a:rPr>
               <a:t>Un comptage de huit heures caméra allumée vide un téléphone. On compte par sessions, ou on prévoit des batteries externes — ce n'est pas gratuit, c'est juste beaucoup moins cher qu'une flotte.</a:t>
             </a:r>
@@ -6863,11 +6863,11 @@
             <a:r>
               <a:rPr lang="en-US" sz="1300" b="1" dirty="0">
                 <a:solidFill>
-                  <a:srgbClr val="0B0F19"/>
-                </a:solidFill>
-                <a:latin typeface="Inter" pitchFamily="34" charset="0"/>
-                <a:ea typeface="Inter" pitchFamily="34" charset="-122"/>
-                <a:cs typeface="Inter" pitchFamily="34" charset="-120"/>
+                  <a:srgbClr val="14181A"/>
+                </a:solidFill>
+                <a:latin typeface="Public Sans" pitchFamily="34" charset="0"/>
+                <a:ea typeface="Public Sans" pitchFamily="34" charset="-122"/>
+                <a:cs typeface="Public Sans" pitchFamily="34" charset="-120"/>
               </a:rPr>
               <a:t>Une flotte déjà amortie ne coûte plus rien. </a:t>
             </a:r>
@@ -6883,11 +6883,11 @@
             <a:r>
               <a:rPr lang="en-US" sz="1300" dirty="0">
                 <a:solidFill>
-                  <a:srgbClr val="3D4556"/>
-                </a:solidFill>
-                <a:latin typeface="Inter" pitchFamily="34" charset="0"/>
-                <a:ea typeface="Inter" pitchFamily="34" charset="-122"/>
-                <a:cs typeface="Inter" pitchFamily="34" charset="-120"/>
+                  <a:srgbClr val="3A423F"/>
+                </a:solidFill>
+                <a:latin typeface="Public Sans" pitchFamily="34" charset="0"/>
+                <a:ea typeface="Public Sans" pitchFamily="34" charset="-122"/>
+                <a:cs typeface="Public Sans" pitchFamily="34" charset="-120"/>
               </a:rPr>
               <a:t>Si vos terminaux sont payés et fonctionnent, l'économie de matériel ne joue pas. Les autres arguments restent : la prise en main sans briefing, les comptages illimités, la réconciliation qui disparaît.</a:t>
             </a:r>
@@ -6908,15 +6908,15 @@
           </a:xfrm>
           <a:prstGeom prst="roundRect">
             <a:avLst>
-              <a:gd name="adj" fmla="val 7273"/>
+              <a:gd name="adj" fmla="val 3636"/>
             </a:avLst>
           </a:prstGeom>
           <a:solidFill>
-            <a:srgbClr val="EEEEFC"/>
+            <a:srgbClr val="E7EDE9"/>
           </a:solidFill>
           <a:ln w="12700">
             <a:solidFill>
-              <a:srgbClr val="EEEEFC"/>
+              <a:srgbClr val="E7EDE9"/>
             </a:solidFill>
             <a:prstDash val="solid"/>
           </a:ln>
@@ -6949,11 +6949,11 @@
             <a:r>
               <a:rPr lang="en-US" sz="950" b="1" dirty="0">
                 <a:solidFill>
-                  <a:srgbClr val="5B6475"/>
-                </a:solidFill>
-                <a:latin typeface="Inter" pitchFamily="34" charset="0"/>
-                <a:ea typeface="Inter" pitchFamily="34" charset="-122"/>
-                <a:cs typeface="Inter" pitchFamily="34" charset="-120"/>
+                  <a:srgbClr val="575F5C"/>
+                </a:solidFill>
+                <a:latin typeface="Public Sans" pitchFamily="34" charset="0"/>
+                <a:ea typeface="Public Sans" pitchFamily="34" charset="-122"/>
+                <a:cs typeface="Public Sans" pitchFamily="34" charset="-120"/>
               </a:rPr>
               <a:t>Ce qui ne bouge pas</a:t>
             </a:r>
@@ -6991,11 +6991,11 @@
             <a:r>
               <a:rPr lang="en-US" sz="1150" i="1" dirty="0">
                 <a:solidFill>
-                  <a:srgbClr val="3D4556"/>
-                </a:solidFill>
-                <a:latin typeface="Inter" pitchFamily="34" charset="0"/>
-                <a:ea typeface="Inter" pitchFamily="34" charset="-122"/>
-                <a:cs typeface="Inter" pitchFamily="34" charset="-120"/>
+                  <a:srgbClr val="3A423F"/>
+                </a:solidFill>
+                <a:latin typeface="Public Sans" pitchFamily="34" charset="0"/>
+                <a:ea typeface="Public Sans" pitchFamily="34" charset="-122"/>
+                <a:cs typeface="Public Sans" pitchFamily="34" charset="-120"/>
               </a:rPr>
               <a:t>Un outil expert suppose un service expert pour le servir. C'est ce qui empêche de confier l'inventaire aux équipes de vente — et c'est précisément ce que nous rendons possible.</a:t>
             </a:r>
@@ -7030,11 +7030,11 @@
             <a:r>
               <a:rPr lang="en-US" sz="900" dirty="0">
                 <a:solidFill>
-                  <a:srgbClr val="5B6475"/>
-                </a:solidFill>
-                <a:latin typeface="Inter" pitchFamily="34" charset="0"/>
-                <a:ea typeface="Inter" pitchFamily="34" charset="-122"/>
-                <a:cs typeface="Inter" pitchFamily="34" charset="-120"/>
+                  <a:srgbClr val="575F5C"/>
+                </a:solidFill>
+                <a:latin typeface="Public Sans" pitchFamily="34" charset="0"/>
+                <a:ea typeface="Public Sans" pitchFamily="34" charset="-122"/>
+                <a:cs typeface="Public Sans" pitchFamily="34" charset="-120"/>
               </a:rPr>
               <a:t>Quantinvo · l’essentiel</a:t>
             </a:r>
@@ -7069,11 +7069,11 @@
             <a:r>
               <a:rPr lang="en-US" sz="900" dirty="0">
                 <a:solidFill>
-                  <a:srgbClr val="5B6475"/>
-                </a:solidFill>
-                <a:latin typeface="Inter" pitchFamily="34" charset="0"/>
-                <a:ea typeface="Inter" pitchFamily="34" charset="-122"/>
-                <a:cs typeface="Inter" pitchFamily="34" charset="-120"/>
+                  <a:srgbClr val="575F5C"/>
+                </a:solidFill>
+                <a:latin typeface="Public Sans" pitchFamily="34" charset="0"/>
+                <a:ea typeface="Public Sans" pitchFamily="34" charset="-122"/>
+                <a:cs typeface="Public Sans" pitchFamily="34" charset="-120"/>
               </a:rPr>
               <a:t>8</a:t>
             </a:r>
@@ -7164,11 +7164,11 @@
             <a:r>
               <a:rPr lang="en-US" sz="1600" b="1" dirty="0">
                 <a:solidFill>
-                  <a:srgbClr val="0B0F19"/>
-                </a:solidFill>
-                <a:latin typeface="Sora" pitchFamily="34" charset="0"/>
-                <a:ea typeface="Sora" pitchFamily="34" charset="-122"/>
-                <a:cs typeface="Sora" pitchFamily="34" charset="-120"/>
+                  <a:srgbClr val="14181A"/>
+                </a:solidFill>
+                <a:latin typeface="Archivo" pitchFamily="34" charset="0"/>
+                <a:ea typeface="Archivo" pitchFamily="34" charset="-122"/>
+                <a:cs typeface="Archivo" pitchFamily="34" charset="-120"/>
               </a:rPr>
               <a:t>Quantinvo</a:t>
             </a:r>
@@ -7203,11 +7203,11 @@
             <a:r>
               <a:rPr lang="en-US" sz="1000" dirty="0">
                 <a:solidFill>
-                  <a:srgbClr val="5B6475"/>
-                </a:solidFill>
-                <a:latin typeface="Inter" pitchFamily="34" charset="0"/>
-                <a:ea typeface="Inter" pitchFamily="34" charset="-122"/>
-                <a:cs typeface="Inter" pitchFamily="34" charset="-120"/>
+                  <a:srgbClr val="575F5C"/>
+                </a:solidFill>
+                <a:latin typeface="Public Sans" pitchFamily="34" charset="0"/>
+                <a:ea typeface="Public Sans" pitchFamily="34" charset="-122"/>
+                <a:cs typeface="Public Sans" pitchFamily="34" charset="-120"/>
               </a:rPr>
               <a:t>Pour être clair</a:t>
             </a:r>
@@ -7224,17 +7224,17 @@
         <p:spPr>
           <a:xfrm>
             <a:off x="731520" y="877824"/>
-            <a:ext cx="10725912" cy="25603"/>
+            <a:ext cx="10725912" cy="10973"/>
           </a:xfrm>
           <a:prstGeom prst="rect">
             <a:avLst/>
           </a:prstGeom>
           <a:solidFill>
-            <a:srgbClr val="38C9FF"/>
+            <a:srgbClr val="E2E5E1"/>
           </a:solidFill>
           <a:ln w="12700">
             <a:solidFill>
-              <a:srgbClr val="38C9FF"/>
+              <a:srgbClr val="E2E5E1"/>
             </a:solidFill>
             <a:prstDash val="solid"/>
           </a:ln>
@@ -7270,11 +7270,11 @@
             <a:r>
               <a:rPr lang="en-US" sz="2600" b="1" dirty="0">
                 <a:solidFill>
-                  <a:srgbClr val="4636B0"/>
-                </a:solidFill>
-                <a:latin typeface="Sora" pitchFamily="34" charset="0"/>
-                <a:ea typeface="Sora" pitchFamily="34" charset="-122"/>
-                <a:cs typeface="Sora" pitchFamily="34" charset="-120"/>
+                  <a:srgbClr val="14181A"/>
+                </a:solidFill>
+                <a:latin typeface="Archivo" pitchFamily="34" charset="0"/>
+                <a:ea typeface="Archivo" pitchFamily="34" charset="-122"/>
+                <a:cs typeface="Archivo" pitchFamily="34" charset="-120"/>
               </a:rPr>
               <a:t>Ce qu’on ne vous promet pas.</a:t>
             </a:r>
@@ -7312,11 +7312,11 @@
             <a:r>
               <a:rPr lang="en-US" sz="1250" i="1" dirty="0">
                 <a:solidFill>
-                  <a:srgbClr val="5B6475"/>
-                </a:solidFill>
-                <a:latin typeface="Inter" pitchFamily="34" charset="0"/>
-                <a:ea typeface="Inter" pitchFamily="34" charset="-122"/>
-                <a:cs typeface="Inter" pitchFamily="34" charset="-120"/>
+                  <a:srgbClr val="575F5C"/>
+                </a:solidFill>
+                <a:latin typeface="Public Sans" pitchFamily="34" charset="0"/>
+                <a:ea typeface="Public Sans" pitchFamily="34" charset="-122"/>
+                <a:cs typeface="Public Sans" pitchFamily="34" charset="-120"/>
               </a:rPr>
               <a:t>Autant le dire avant la démonstration qu’après.</a:t>
             </a:r>
@@ -7357,11 +7357,11 @@
             <a:r>
               <a:rPr lang="en-US" sz="1300" b="1" dirty="0">
                 <a:solidFill>
-                  <a:srgbClr val="0B0F19"/>
-                </a:solidFill>
-                <a:latin typeface="Inter" pitchFamily="34" charset="0"/>
-                <a:ea typeface="Inter" pitchFamily="34" charset="-122"/>
-                <a:cs typeface="Inter" pitchFamily="34" charset="-120"/>
+                  <a:srgbClr val="14181A"/>
+                </a:solidFill>
+                <a:latin typeface="Public Sans" pitchFamily="34" charset="0"/>
+                <a:ea typeface="Public Sans" pitchFamily="34" charset="-122"/>
+                <a:cs typeface="Public Sans" pitchFamily="34" charset="-120"/>
               </a:rPr>
               <a:t>L'inventaire fiscal certifié. </a:t>
             </a:r>
@@ -7377,11 +7377,11 @@
             <a:r>
               <a:rPr lang="en-US" sz="1300" dirty="0">
                 <a:solidFill>
-                  <a:srgbClr val="3D4556"/>
-                </a:solidFill>
-                <a:latin typeface="Inter" pitchFamily="34" charset="0"/>
-                <a:ea typeface="Inter" pitchFamily="34" charset="-122"/>
-                <a:cs typeface="Inter" pitchFamily="34" charset="-120"/>
+                  <a:srgbClr val="3A423F"/>
+                </a:solidFill>
+                <a:latin typeface="Public Sans" pitchFamily="34" charset="0"/>
+                <a:ea typeface="Public Sans" pitchFamily="34" charset="-122"/>
+                <a:cs typeface="Public Sans" pitchFamily="34" charset="-120"/>
               </a:rPr>
               <a:t>Si votre commissaire aux comptes exige un comptage par un tiers, ce comptage reste. Quantinvo fait tout le reste de l'année, et il le prépare.</a:t>
             </a:r>
@@ -7400,11 +7400,11 @@
             <a:r>
               <a:rPr lang="en-US" sz="1300" b="1" dirty="0">
                 <a:solidFill>
-                  <a:srgbClr val="0B0F19"/>
-                </a:solidFill>
-                <a:latin typeface="Inter" pitchFamily="34" charset="0"/>
-                <a:ea typeface="Inter" pitchFamily="34" charset="-122"/>
-                <a:cs typeface="Inter" pitchFamily="34" charset="-120"/>
+                  <a:srgbClr val="14181A"/>
+                </a:solidFill>
+                <a:latin typeface="Public Sans" pitchFamily="34" charset="0"/>
+                <a:ea typeface="Public Sans" pitchFamily="34" charset="-122"/>
+                <a:cs typeface="Public Sans" pitchFamily="34" charset="-120"/>
               </a:rPr>
               <a:t>Une connexion à votre ERP. </a:t>
             </a:r>
@@ -7420,11 +7420,11 @@
             <a:r>
               <a:rPr lang="en-US" sz="1300" dirty="0">
                 <a:solidFill>
-                  <a:srgbClr val="3D4556"/>
-                </a:solidFill>
-                <a:latin typeface="Inter" pitchFamily="34" charset="0"/>
-                <a:ea typeface="Inter" pitchFamily="34" charset="-122"/>
-                <a:cs typeface="Inter" pitchFamily="34" charset="-120"/>
+                  <a:srgbClr val="3A423F"/>
+                </a:solidFill>
+                <a:latin typeface="Public Sans" pitchFamily="34" charset="0"/>
+                <a:ea typeface="Public Sans" pitchFamily="34" charset="-122"/>
+                <a:cs typeface="Public Sans" pitchFamily="34" charset="-120"/>
               </a:rPr>
               <a:t>Pas encore. Quantinvo importe vos fichiers et rend un Excel. C'est ce qui permet de démarrer en une journée, sans projet informatique.</a:t>
             </a:r>
@@ -7443,11 +7443,11 @@
             <a:r>
               <a:rPr lang="en-US" sz="1300" b="1" dirty="0">
                 <a:solidFill>
-                  <a:srgbClr val="0B0F19"/>
-                </a:solidFill>
-                <a:latin typeface="Inter" pitchFamily="34" charset="0"/>
-                <a:ea typeface="Inter" pitchFamily="34" charset="-122"/>
-                <a:cs typeface="Inter" pitchFamily="34" charset="-120"/>
+                  <a:srgbClr val="14181A"/>
+                </a:solidFill>
+                <a:latin typeface="Public Sans" pitchFamily="34" charset="0"/>
+                <a:ea typeface="Public Sans" pitchFamily="34" charset="-122"/>
+                <a:cs typeface="Public Sans" pitchFamily="34" charset="-120"/>
               </a:rPr>
               <a:t>Android sur les boutiques. </a:t>
             </a:r>
@@ -7463,11 +7463,11 @@
             <a:r>
               <a:rPr lang="en-US" sz="1300" dirty="0">
                 <a:solidFill>
-                  <a:srgbClr val="3D4556"/>
-                </a:solidFill>
-                <a:latin typeface="Inter" pitchFamily="34" charset="0"/>
-                <a:ea typeface="Inter" pitchFamily="34" charset="-122"/>
-                <a:cs typeface="Inter" pitchFamily="34" charset="-120"/>
+                  <a:srgbClr val="3A423F"/>
+                </a:solidFill>
+                <a:latin typeface="Public Sans" pitchFamily="34" charset="0"/>
+                <a:ea typeface="Public Sans" pitchFamily="34" charset="-122"/>
+                <a:cs typeface="Public Sans" pitchFamily="34" charset="-120"/>
               </a:rPr>
               <a:t>L'application tourne sur Android, et elle est disponible sur iPhone. La mise en ligne sur Google Play est en cours ; d'ici là, l'installation passe par votre catalogue d'entreprise.</a:t>
             </a:r>
@@ -7486,11 +7486,11 @@
             <a:r>
               <a:rPr lang="en-US" sz="1300" b="1" dirty="0">
                 <a:solidFill>
-                  <a:srgbClr val="0B0F19"/>
-                </a:solidFill>
-                <a:latin typeface="Inter" pitchFamily="34" charset="0"/>
-                <a:ea typeface="Inter" pitchFamily="34" charset="-122"/>
-                <a:cs typeface="Inter" pitchFamily="34" charset="-120"/>
+                  <a:srgbClr val="14181A"/>
+                </a:solidFill>
+                <a:latin typeface="Public Sans" pitchFamily="34" charset="0"/>
+                <a:ea typeface="Public Sans" pitchFamily="34" charset="-122"/>
+                <a:cs typeface="Public Sans" pitchFamily="34" charset="-120"/>
               </a:rPr>
               <a:t>La connexion par votre annuaire. </a:t>
             </a:r>
@@ -7506,11 +7506,11 @@
             <a:r>
               <a:rPr lang="en-US" sz="1300" dirty="0">
                 <a:solidFill>
-                  <a:srgbClr val="3D4556"/>
-                </a:solidFill>
-                <a:latin typeface="Inter" pitchFamily="34" charset="0"/>
-                <a:ea typeface="Inter" pitchFamily="34" charset="-122"/>
-                <a:cs typeface="Inter" pitchFamily="34" charset="-120"/>
+                  <a:srgbClr val="3A423F"/>
+                </a:solidFill>
+                <a:latin typeface="Public Sans" pitchFamily="34" charset="0"/>
+                <a:ea typeface="Public Sans" pitchFamily="34" charset="-122"/>
+                <a:cs typeface="Public Sans" pitchFamily="34" charset="-120"/>
               </a:rPr>
               <a:t>Les comptes sont nominatifs, créés par invitation. Pas de SAML ni d'Entra ID pour l'instant ; dites-nous si c'est une exigence.</a:t>
             </a:r>
@@ -7545,11 +7545,11 @@
             <a:r>
               <a:rPr lang="en-US" sz="900" dirty="0">
                 <a:solidFill>
-                  <a:srgbClr val="5B6475"/>
-                </a:solidFill>
-                <a:latin typeface="Inter" pitchFamily="34" charset="0"/>
-                <a:ea typeface="Inter" pitchFamily="34" charset="-122"/>
-                <a:cs typeface="Inter" pitchFamily="34" charset="-120"/>
+                  <a:srgbClr val="575F5C"/>
+                </a:solidFill>
+                <a:latin typeface="Public Sans" pitchFamily="34" charset="0"/>
+                <a:ea typeface="Public Sans" pitchFamily="34" charset="-122"/>
+                <a:cs typeface="Public Sans" pitchFamily="34" charset="-120"/>
               </a:rPr>
               <a:t>Quantinvo · l’essentiel</a:t>
             </a:r>
@@ -7584,11 +7584,11 @@
             <a:r>
               <a:rPr lang="en-US" sz="900" dirty="0">
                 <a:solidFill>
-                  <a:srgbClr val="5B6475"/>
-                </a:solidFill>
-                <a:latin typeface="Inter" pitchFamily="34" charset="0"/>
-                <a:ea typeface="Inter" pitchFamily="34" charset="-122"/>
-                <a:cs typeface="Inter" pitchFamily="34" charset="-120"/>
+                  <a:srgbClr val="575F5C"/>
+                </a:solidFill>
+                <a:latin typeface="Public Sans" pitchFamily="34" charset="0"/>
+                <a:ea typeface="Public Sans" pitchFamily="34" charset="-122"/>
+                <a:cs typeface="Public Sans" pitchFamily="34" charset="-120"/>
               </a:rPr>
               <a:t>9</a:t>
             </a:r>
